--- a/teaching/cs513-autocps-fall-2026/slides/4-Stability.pptx
+++ b/teaching/cs513-autocps-fall-2026/slides/4-Stability.pptx
@@ -247,7 +247,7 @@
           <a:p>
             <a:fld id="{459B985A-4C37-4D1F-A437-E4A951A85D11}" type="datetimeFigureOut">
               <a:rPr lang="en-US" smtClean="0"/>
-              <a:t>8/25/2026</a:t>
+              <a:t>9/22/2026</a:t>
             </a:fld>
             <a:endParaRPr lang="en-US"/>
           </a:p>
@@ -424,7 +424,7 @@
           <a:p>
             <a:fld id="{6580C23F-98B7-41D4-A9FA-15A275A51486}" type="datetimeFigureOut">
               <a:rPr lang="en-US" smtClean="0"/>
-              <a:t>8/25/2026</a:t>
+              <a:t>9/22/2026</a:t>
             </a:fld>
             <a:endParaRPr lang="en-US"/>
           </a:p>
@@ -2643,7 +2643,16 @@
                       <a:rPr lang="en-US" b="0" i="1" smtClean="0">
                         <a:latin typeface="Cambria Math" panose="02040503050406030204" pitchFamily="18" charset="0"/>
                       </a:rPr>
-                      <m:t>=ℓ</m:t>
+                      <m:t>=</m:t>
+                    </m:r>
+                    <m:r>
+                      <m:rPr>
+                        <m:sty m:val="p"/>
+                      </m:rPr>
+                      <a:rPr lang="en-US" b="0" i="1" smtClean="0">
+                        <a:latin typeface="Cambria Math" panose="02040503050406030204" pitchFamily="18" charset="0"/>
+                      </a:rPr>
+                      <m:t>ℓ</m:t>
                     </m:r>
                     <m:r>
                       <a:rPr lang="en-US" b="0" i="1" smtClean="0">
@@ -2704,7 +2713,16 @@
                       <a:rPr lang="en-US" b="0" i="1" smtClean="0">
                         <a:latin typeface="Cambria Math" panose="02040503050406030204" pitchFamily="18" charset="0"/>
                       </a:rPr>
-                      <m:t>=ℓ</m:t>
+                      <m:t>=</m:t>
+                    </m:r>
+                    <m:r>
+                      <m:rPr>
+                        <m:sty m:val="p"/>
+                      </m:rPr>
+                      <a:rPr lang="en-US" b="0" i="1" smtClean="0">
+                        <a:latin typeface="Cambria Math" panose="02040503050406030204" pitchFamily="18" charset="0"/>
+                      </a:rPr>
+                      <m:t>ℓ</m:t>
                     </m:r>
                     <m:f>
                       <m:fPr>
@@ -2790,12 +2808,21 @@
                       <a:rPr lang="en-US" i="1">
                         <a:latin typeface="Cambria Math" panose="02040503050406030204" pitchFamily="18" charset="0"/>
                       </a:rPr>
-                      <m:t>=ℓ</m:t>
+                      <m:t>=</m:t>
+                    </m:r>
+                    <m:r>
+                      <m:rPr>
+                        <m:sty m:val="p"/>
+                      </m:rPr>
+                      <a:rPr lang="en-US" i="1">
+                        <a:latin typeface="Cambria Math" panose="02040503050406030204" pitchFamily="18" charset="0"/>
+                      </a:rPr>
+                      <m:t>ℓ</m:t>
                     </m:r>
                     <m:f>
                       <m:fPr>
                         <m:ctrlPr>
-                          <a:rPr lang="en-US" i="1">
+                          <a:rPr lang="en-US" b="0" i="1" smtClean="0">
                             <a:latin typeface="Cambria Math" panose="02040503050406030204" pitchFamily="18" charset="0"/>
                           </a:rPr>
                         </m:ctrlPr>
@@ -2804,7 +2831,7 @@
                         <m:sSup>
                           <m:sSupPr>
                             <m:ctrlPr>
-                              <a:rPr lang="en-US" b="0" i="1" smtClean="0">
+                              <a:rPr lang="en-US" i="1">
                                 <a:latin typeface="Cambria Math" panose="02040503050406030204" pitchFamily="18" charset="0"/>
                               </a:rPr>
                             </m:ctrlPr>
@@ -2843,7 +2870,7 @@
                         <m:sSup>
                           <m:sSupPr>
                             <m:ctrlPr>
-                              <a:rPr lang="en-US" b="0" i="1" smtClean="0">
+                              <a:rPr lang="en-US" i="1">
                                 <a:latin typeface="Cambria Math" panose="02040503050406030204" pitchFamily="18" charset="0"/>
                               </a:rPr>
                             </m:ctrlPr>
@@ -2914,7 +2941,7 @@
                     <m:func>
                       <m:funcPr>
                         <m:ctrlPr>
-                          <a:rPr lang="en-US" b="0" i="1" smtClean="0">
+                          <a:rPr lang="en-US" b="0" i="0" smtClean="0">
                             <a:latin typeface="Cambria Math" panose="02040503050406030204" pitchFamily="18" charset="0"/>
                           </a:rPr>
                         </m:ctrlPr>
@@ -2978,6 +3005,9 @@
                 <a14:m>
                   <m:oMath xmlns:m="http://schemas.openxmlformats.org/officeDocument/2006/math">
                     <m:r>
+                      <m:rPr>
+                        <m:sty m:val="p"/>
+                      </m:rPr>
                       <a:rPr lang="en-US" b="0" i="1" smtClean="0">
                         <a:latin typeface="Cambria Math" panose="02040503050406030204" pitchFamily="18" charset="0"/>
                       </a:rPr>
@@ -3073,7 +3103,7 @@
                     <m:func>
                       <m:funcPr>
                         <m:ctrlPr>
-                          <a:rPr lang="en-US" i="1">
+                          <a:rPr lang="en-US">
                             <a:latin typeface="Cambria Math" panose="02040503050406030204" pitchFamily="18" charset="0"/>
                           </a:rPr>
                         </m:ctrlPr>
@@ -3486,10 +3516,7 @@
                 <a:pPr/>
                 <a14:m>
                   <m:oMathPara xmlns:m="http://schemas.openxmlformats.org/officeDocument/2006/math">
-                    <m:oMathParaPr>
-                      <m:jc m:val="centerGroup"/>
-                    </m:oMathParaPr>
-                    <m:oMath xmlns:m="http://schemas.openxmlformats.org/officeDocument/2006/math">
+                    <m:oMath>
                       <m:r>
                         <a:rPr lang="en-US" sz="2800" b="0" i="1" smtClean="0">
                           <a:latin typeface="Cambria Math" panose="02040503050406030204" pitchFamily="18" charset="0"/>
@@ -3582,10 +3609,7 @@
                 <a:pPr/>
                 <a14:m>
                   <m:oMathPara xmlns:m="http://schemas.openxmlformats.org/officeDocument/2006/math">
-                    <m:oMathParaPr>
-                      <m:jc m:val="centerGroup"/>
-                    </m:oMathParaPr>
-                    <m:oMath xmlns:m="http://schemas.openxmlformats.org/officeDocument/2006/math">
+                    <m:oMath>
                       <m:r>
                         <a:rPr lang="en-US" sz="2800" b="0" i="1" smtClean="0">
                           <a:latin typeface="Cambria Math" panose="02040503050406030204" pitchFamily="18" charset="0"/>
@@ -3678,10 +3702,7 @@
                 <a:pPr/>
                 <a14:m>
                   <m:oMathPara xmlns:m="http://schemas.openxmlformats.org/officeDocument/2006/math">
-                    <m:oMathParaPr>
-                      <m:jc m:val="centerGroup"/>
-                    </m:oMathParaPr>
-                    <m:oMath xmlns:m="http://schemas.openxmlformats.org/officeDocument/2006/math">
+                    <m:oMath>
                       <m:r>
                         <a:rPr lang="en-US" sz="2800" b="0" i="1" smtClean="0">
                           <a:latin typeface="Cambria Math" panose="02040503050406030204" pitchFamily="18" charset="0"/>
@@ -3691,7 +3712,7 @@
                       <m:func>
                         <m:funcPr>
                           <m:ctrlPr>
-                            <a:rPr lang="en-US" sz="2800" b="0" i="1" smtClean="0">
+                            <a:rPr lang="en-US" sz="2800" b="0" i="0" smtClean="0">
                               <a:latin typeface="Cambria Math" panose="02040503050406030204" pitchFamily="18" charset="0"/>
                             </a:rPr>
                           </m:ctrlPr>
@@ -3802,10 +3823,7 @@
                 <a:pPr/>
                 <a14:m>
                   <m:oMathPara xmlns:m="http://schemas.openxmlformats.org/officeDocument/2006/math">
-                    <m:oMathParaPr>
-                      <m:jc m:val="centerGroup"/>
-                    </m:oMathParaPr>
-                    <m:oMath xmlns:m="http://schemas.openxmlformats.org/officeDocument/2006/math">
+                    <m:oMath>
                       <m:r>
                         <a:rPr lang="en-US" sz="2800" b="0" i="1" smtClean="0">
                           <a:latin typeface="Cambria Math" panose="02040503050406030204" pitchFamily="18" charset="0"/>
@@ -3815,7 +3833,7 @@
                       <m:func>
                         <m:funcPr>
                           <m:ctrlPr>
-                            <a:rPr lang="en-US" sz="2800" b="0" i="1" smtClean="0">
+                            <a:rPr lang="en-US" sz="2800" b="0" i="0" smtClean="0">
                               <a:latin typeface="Cambria Math" panose="02040503050406030204" pitchFamily="18" charset="0"/>
                             </a:rPr>
                           </m:ctrlPr>
@@ -4057,11 +4075,11 @@
                 <a:pPr/>
                 <a14:m>
                   <m:oMathPara xmlns:m="http://schemas.openxmlformats.org/officeDocument/2006/math">
-                    <m:oMathParaPr>
-                      <m:jc m:val="centerGroup"/>
-                    </m:oMathParaPr>
-                    <m:oMath xmlns:m="http://schemas.openxmlformats.org/officeDocument/2006/math">
+                    <m:oMath>
                       <m:r>
+                        <m:rPr>
+                          <m:sty m:val="p"/>
+                        </m:rPr>
                         <a:rPr lang="en-US" sz="2800" b="0" i="1" smtClean="0">
                           <a:latin typeface="Cambria Math" panose="02040503050406030204" pitchFamily="18" charset="0"/>
                         </a:rPr>
@@ -4381,6 +4399,9 @@
                 <a14:m>
                   <m:oMath xmlns:m="http://schemas.openxmlformats.org/officeDocument/2006/math">
                     <m:r>
+                      <m:rPr>
+                        <m:sty m:val="p"/>
+                      </m:rPr>
                       <a:rPr lang="en-US" b="0" i="1" smtClean="0">
                         <a:latin typeface="Cambria Math" panose="02040503050406030204" pitchFamily="18" charset="0"/>
                       </a:rPr>
@@ -4430,6 +4451,9 @@
                           <m:t>𝑚</m:t>
                         </m:r>
                         <m:r>
+                          <m:rPr>
+                            <m:sty m:val="p"/>
+                          </m:rPr>
                           <a:rPr lang="en-US" b="0" i="1" smtClean="0">
                             <a:latin typeface="Cambria Math" panose="02040503050406030204" pitchFamily="18" charset="0"/>
                           </a:rPr>
@@ -4466,7 +4490,7 @@
                     <m:sSub>
                       <m:sSubPr>
                         <m:ctrlPr>
-                          <a:rPr lang="en-US" b="0" i="1" dirty="0" smtClean="0">
+                          <a:rPr lang="en-US" b="0" i="1" smtClean="0">
                             <a:latin typeface="Cambria Math" panose="02040503050406030204" pitchFamily="18" charset="0"/>
                           </a:rPr>
                         </m:ctrlPr>
@@ -4587,7 +4611,7 @@
                     <m:func>
                       <m:funcPr>
                         <m:ctrlPr>
-                          <a:rPr lang="en-US" b="0" i="1" smtClean="0">
+                          <a:rPr lang="en-US" b="0" i="0" smtClean="0">
                             <a:latin typeface="Cambria Math" panose="02040503050406030204" pitchFamily="18" charset="0"/>
                           </a:rPr>
                         </m:ctrlPr>
@@ -4918,103 +4942,6 @@
           </a:p>
         </p:txBody>
       </p:sp>
-      <p:pic>
-        <p:nvPicPr>
-          <p:cNvPr id="5" name="Picture 6" descr="http://upload.wikimedia.org/wikipedia/commons/thumb/f/f5/Alexander_Ljapunow_jung.jpg/220px-Alexander_Ljapunow_jung.jpg">
-            <a:extLst>
-              <a:ext uri="{FF2B5EF4-FFF2-40B4-BE49-F238E27FC236}">
-                <a16:creationId xmlns:a16="http://schemas.microsoft.com/office/drawing/2014/main" id="{59AC7F31-049F-480F-88B9-7CDE2D1C8DD0}"/>
-              </a:ext>
-            </a:extLst>
-          </p:cNvPr>
-          <p:cNvPicPr>
-            <a:picLocks noChangeAspect="1" noChangeArrowheads="1"/>
-          </p:cNvPicPr>
-          <p:nvPr/>
-        </p:nvPicPr>
-        <p:blipFill>
-          <a:blip r:embed="rId3">
-            <a:extLst>
-              <a:ext uri="{28A0092B-C50C-407E-A947-70E740481C1C}">
-                <a14:useLocalDpi xmlns:a14="http://schemas.microsoft.com/office/drawing/2010/main" val="0"/>
-              </a:ext>
-            </a:extLst>
-          </a:blip>
-          <a:srcRect/>
-          <a:stretch>
-            <a:fillRect/>
-          </a:stretch>
-        </p:blipFill>
-        <p:spPr bwMode="auto">
-          <a:xfrm>
-            <a:off x="8791815" y="1695926"/>
-            <a:ext cx="2095500" cy="2876551"/>
-          </a:xfrm>
-          <a:prstGeom prst="rect">
-            <a:avLst/>
-          </a:prstGeom>
-          <a:noFill/>
-          <a:extLst>
-            <a:ext uri="{909E8E84-426E-40DD-AFC4-6F175D3DCCD1}">
-              <a14:hiddenFill xmlns:a14="http://schemas.microsoft.com/office/drawing/2010/main">
-                <a:solidFill>
-                  <a:srgbClr val="FFFFFF"/>
-                </a:solidFill>
-              </a14:hiddenFill>
-            </a:ext>
-          </a:extLst>
-        </p:spPr>
-      </p:pic>
-      <p:sp>
-        <p:nvSpPr>
-          <p:cNvPr id="6" name="Oval Callout 4">
-            <a:extLst>
-              <a:ext uri="{FF2B5EF4-FFF2-40B4-BE49-F238E27FC236}">
-                <a16:creationId xmlns:a16="http://schemas.microsoft.com/office/drawing/2014/main" id="{38B573A5-056C-481E-BC9B-A56F794D379B}"/>
-              </a:ext>
-            </a:extLst>
-          </p:cNvPr>
-          <p:cNvSpPr/>
-          <p:nvPr/>
-        </p:nvSpPr>
-        <p:spPr>
-          <a:xfrm>
-            <a:off x="9739318" y="4173174"/>
-            <a:ext cx="2286000" cy="1525051"/>
-          </a:xfrm>
-          <a:prstGeom prst="wedgeEllipseCallout">
-            <a:avLst>
-              <a:gd name="adj1" fmla="val -18953"/>
-              <a:gd name="adj2" fmla="val -126912"/>
-            </a:avLst>
-          </a:prstGeom>
-        </p:spPr>
-        <p:style>
-          <a:lnRef idx="2">
-            <a:schemeClr val="dk1"/>
-          </a:lnRef>
-          <a:fillRef idx="1">
-            <a:schemeClr val="lt1"/>
-          </a:fillRef>
-          <a:effectRef idx="0">
-            <a:schemeClr val="dk1"/>
-          </a:effectRef>
-          <a:fontRef idx="minor">
-            <a:schemeClr val="dk1"/>
-          </a:fontRef>
-        </p:style>
-        <p:txBody>
-          <a:bodyPr rtlCol="0" anchor="ctr"/>
-          <a:lstStyle/>
-          <a:p>
-            <a:pPr algn="ctr"/>
-            <a:r>
-              <a:rPr lang="en-US" sz="2800" b="1" dirty="0"/>
-              <a:t>Use my method!!</a:t>
-            </a:r>
-          </a:p>
-        </p:txBody>
-      </p:sp>
       <p:sp>
         <p:nvSpPr>
           <p:cNvPr id="7" name="TextBox 6">
@@ -5056,6 +4983,86 @@
           </a:p>
         </p:txBody>
       </p:sp>
+      <p:pic>
+        <p:nvPicPr>
+          <p:cNvPr id="8" name="Picture 7">
+            <a:extLst>
+              <a:ext uri="{FF2B5EF4-FFF2-40B4-BE49-F238E27FC236}">
+                <a16:creationId xmlns:a16="http://schemas.microsoft.com/office/drawing/2014/main" id="{36CA2DD9-1BBA-2998-6551-FAAE89FC102D}"/>
+              </a:ext>
+            </a:extLst>
+          </p:cNvPr>
+          <p:cNvPicPr>
+            <a:picLocks noChangeAspect="1"/>
+          </p:cNvPicPr>
+          <p:nvPr/>
+        </p:nvPicPr>
+        <p:blipFill>
+          <a:blip r:embed="rId3"/>
+          <a:stretch>
+            <a:fillRect/>
+          </a:stretch>
+        </p:blipFill>
+        <p:spPr>
+          <a:xfrm>
+            <a:off x="9056216" y="1684383"/>
+            <a:ext cx="2381250" cy="3105150"/>
+          </a:xfrm>
+          <a:prstGeom prst="rect">
+            <a:avLst/>
+          </a:prstGeom>
+        </p:spPr>
+      </p:pic>
+      <p:sp>
+        <p:nvSpPr>
+          <p:cNvPr id="6" name="Oval Callout 4">
+            <a:extLst>
+              <a:ext uri="{FF2B5EF4-FFF2-40B4-BE49-F238E27FC236}">
+                <a16:creationId xmlns:a16="http://schemas.microsoft.com/office/drawing/2014/main" id="{38B573A5-056C-481E-BC9B-A56F794D379B}"/>
+              </a:ext>
+            </a:extLst>
+          </p:cNvPr>
+          <p:cNvSpPr/>
+          <p:nvPr/>
+        </p:nvSpPr>
+        <p:spPr>
+          <a:xfrm>
+            <a:off x="9739318" y="4789533"/>
+            <a:ext cx="2286000" cy="1525051"/>
+          </a:xfrm>
+          <a:prstGeom prst="wedgeEllipseCallout">
+            <a:avLst>
+              <a:gd name="adj1" fmla="val -21656"/>
+              <a:gd name="adj2" fmla="val -141497"/>
+            </a:avLst>
+          </a:prstGeom>
+        </p:spPr>
+        <p:style>
+          <a:lnRef idx="2">
+            <a:schemeClr val="dk1"/>
+          </a:lnRef>
+          <a:fillRef idx="1">
+            <a:schemeClr val="lt1"/>
+          </a:fillRef>
+          <a:effectRef idx="0">
+            <a:schemeClr val="dk1"/>
+          </a:effectRef>
+          <a:fontRef idx="minor">
+            <a:schemeClr val="dk1"/>
+          </a:fontRef>
+        </p:style>
+        <p:txBody>
+          <a:bodyPr rtlCol="0" anchor="ctr"/>
+          <a:lstStyle/>
+          <a:p>
+            <a:pPr algn="ctr"/>
+            <a:r>
+              <a:rPr lang="en-US" sz="2800" b="1" dirty="0"/>
+              <a:t>Use my method!!</a:t>
+            </a:r>
+          </a:p>
+        </p:txBody>
+      </p:sp>
     </p:spTree>
     <p:extLst>
       <p:ext uri="{BB962C8B-B14F-4D97-AF65-F5344CB8AC3E}">
@@ -5078,6 +5085,9 @@
                     <p:cTn id="3" fill="hold">
                       <p:stCondLst>
                         <p:cond delay="indefinite"/>
+                        <p:cond evt="onBegin" delay="0">
+                          <p:tn val="2"/>
+                        </p:cond>
                       </p:stCondLst>
                       <p:childTnLst>
                         <p:par>
@@ -5087,7 +5097,7 @@
                             </p:stCondLst>
                             <p:childTnLst>
                               <p:par>
-                                <p:cTn id="5" presetID="1" presetClass="entr" presetSubtype="0" fill="hold" nodeType="clickEffect">
+                                <p:cTn id="5" presetID="1" presetClass="entr" presetSubtype="0" fill="hold" grpId="0" nodeType="withEffect">
                                   <p:stCondLst>
                                     <p:cond delay="0"/>
                                   </p:stCondLst>
@@ -5100,7 +5110,7 @@
                                           </p:stCondLst>
                                         </p:cTn>
                                         <p:tgtEl>
-                                          <p:spTgt spid="5"/>
+                                          <p:spTgt spid="6"/>
                                         </p:tgtEl>
                                         <p:attrNameLst>
                                           <p:attrName>style.visibility</p:attrName>
@@ -5122,33 +5132,6 @@
                                     <p:set>
                                       <p:cBhvr>
                                         <p:cTn id="8" dur="1" fill="hold">
-                                          <p:stCondLst>
-                                            <p:cond delay="0"/>
-                                          </p:stCondLst>
-                                        </p:cTn>
-                                        <p:tgtEl>
-                                          <p:spTgt spid="6"/>
-                                        </p:tgtEl>
-                                        <p:attrNameLst>
-                                          <p:attrName>style.visibility</p:attrName>
-                                        </p:attrNameLst>
-                                      </p:cBhvr>
-                                      <p:to>
-                                        <p:strVal val="visible"/>
-                                      </p:to>
-                                    </p:set>
-                                  </p:childTnLst>
-                                </p:cTn>
-                              </p:par>
-                              <p:par>
-                                <p:cTn id="9" presetID="1" presetClass="entr" presetSubtype="0" fill="hold" grpId="0" nodeType="withEffect">
-                                  <p:stCondLst>
-                                    <p:cond delay="0"/>
-                                  </p:stCondLst>
-                                  <p:childTnLst>
-                                    <p:set>
-                                      <p:cBhvr>
-                                        <p:cTn id="10" dur="1" fill="hold">
                                           <p:stCondLst>
                                             <p:cond delay="0"/>
                                           </p:stCondLst>
@@ -5195,8 +5178,8 @@
       </p:par>
     </p:tnLst>
     <p:bldLst>
+      <p:bldP spid="7" grpId="0"/>
       <p:bldP spid="6" grpId="0" animBg="1"/>
-      <p:bldP spid="7" grpId="0"/>
     </p:bldLst>
   </p:timing>
 </p:sld>
@@ -5219,8 +5202,8 @@
           <a:chExt cx="0" cy="0"/>
         </a:xfrm>
       </p:grpSpPr>
-      <mc:AlternateContent xmlns:mc="http://schemas.openxmlformats.org/markup-compatibility/2006">
-        <mc:Choice xmlns:a14="http://schemas.microsoft.com/office/drawing/2010/main" Requires="a14">
+      <mc:AlternateContent xmlns:mc="http://schemas.openxmlformats.org/markup-compatibility/2006" xmlns:a14="http://schemas.microsoft.com/office/drawing/2010/main">
+        <mc:Choice Requires="a14">
           <p:sp>
             <p:nvSpPr>
               <p:cNvPr id="2" name="Content Placeholder 1">
@@ -5254,7 +5237,7 @@
                       <m:accPr>
                         <m:chr m:val="̇"/>
                         <m:ctrlPr>
-                          <a:rPr lang="en-US" i="1">
+                          <a:rPr lang="en-US" b="1">
                             <a:latin typeface="Cambria Math" panose="02040503050406030204" pitchFamily="18" charset="0"/>
                           </a:rPr>
                         </m:ctrlPr>
@@ -5283,7 +5266,7 @@
                     <m:d>
                       <m:dPr>
                         <m:ctrlPr>
-                          <a:rPr lang="en-US" i="1" dirty="0">
+                          <a:rPr lang="en-US" b="1" dirty="0">
                             <a:latin typeface="Cambria Math" panose="02040503050406030204" pitchFamily="18" charset="0"/>
                           </a:rPr>
                         </m:ctrlPr>
@@ -5364,7 +5347,7 @@
                               <m:d>
                                 <m:dPr>
                                   <m:ctrlPr>
-                                    <a:rPr lang="en-US" b="0" i="1" dirty="0" smtClean="0">
+                                    <a:rPr lang="en-US" b="1" i="0" dirty="0" smtClean="0">
                                       <a:latin typeface="Cambria Math" panose="02040503050406030204" pitchFamily="18" charset="0"/>
                                     </a:rPr>
                                   </m:ctrlPr>
@@ -5690,7 +5673,7 @@
                                   <m:sSub>
                                     <m:sSubPr>
                                       <m:ctrlPr>
-                                        <a:rPr lang="en-US" b="0" i="1" smtClean="0">
+                                        <a:rPr lang="en-US" i="1">
                                           <a:latin typeface="Cambria Math" panose="02040503050406030204" pitchFamily="18" charset="0"/>
                                         </a:rPr>
                                       </m:ctrlPr>
@@ -5972,7 +5955,7 @@
                     <m:sSup>
                       <m:sSupPr>
                         <m:ctrlPr>
-                          <a:rPr lang="en-US" b="0" i="1" smtClean="0">
+                          <a:rPr lang="en-US" b="1">
                             <a:latin typeface="Cambria Math" panose="02040503050406030204" pitchFamily="18" charset="0"/>
                           </a:rPr>
                         </m:ctrlPr>
@@ -6096,7 +6079,7 @@
                     <m:sSup>
                       <m:sSupPr>
                         <m:ctrlPr>
-                          <a:rPr lang="en-US" i="1">
+                          <a:rPr lang="en-US" b="1">
                             <a:latin typeface="Cambria Math" panose="02040503050406030204" pitchFamily="18" charset="0"/>
                           </a:rPr>
                         </m:ctrlPr>
@@ -6136,7 +6119,7 @@
                       <m:accPr>
                         <m:chr m:val="̇"/>
                         <m:ctrlPr>
-                          <a:rPr lang="en-US" b="0" i="1" smtClean="0">
+                          <a:rPr lang="en-US" b="1" i="0" smtClean="0">
                             <a:latin typeface="Cambria Math" panose="02040503050406030204" pitchFamily="18" charset="0"/>
                           </a:rPr>
                         </m:ctrlPr>
@@ -6190,7 +6173,7 @@
             </p:txBody>
           </p:sp>
         </mc:Choice>
-        <mc:Fallback>
+        <mc:Fallback xmlns="">
           <p:sp>
             <p:nvSpPr>
               <p:cNvPr id="2" name="Content Placeholder 1">
@@ -6358,7 +6341,7 @@
                     <m:sSub>
                       <m:sSubPr>
                         <m:ctrlPr>
-                          <a:rPr lang="en-US" i="1" dirty="0" smtClean="0">
+                          <a:rPr lang="en-US" i="1">
                             <a:latin typeface="Cambria Math" panose="02040503050406030204" pitchFamily="18" charset="0"/>
                           </a:rPr>
                         </m:ctrlPr>
@@ -6479,7 +6462,7 @@
                     <m:func>
                       <m:funcPr>
                         <m:ctrlPr>
-                          <a:rPr lang="en-US" i="1">
+                          <a:rPr lang="en-US">
                             <a:latin typeface="Cambria Math" panose="02040503050406030204" pitchFamily="18" charset="0"/>
                           </a:rPr>
                         </m:ctrlPr>
@@ -6928,7 +6911,7 @@
               <a:blipFill>
                 <a:blip r:embed="rId2"/>
                 <a:stretch>
-                  <a:fillRect l="-1215" t="-2384"/>
+                  <a:fillRect l="-1215" t="-2525"/>
                 </a:stretch>
               </a:blipFill>
             </p:spPr>
@@ -7241,7 +7224,10 @@
               <a:p>
                 <a:pPr lvl="1"/>
                 <a:r>
-                  <a:rPr lang="en-US" dirty="0"/>
+                  <a:rPr lang="en-US" dirty="0">
+                    <a:latin typeface="Cambria" panose="02040503050406030204" pitchFamily="18" charset="0"/>
+                    <a:ea typeface="Cambria" panose="02040503050406030204" pitchFamily="18" charset="0"/>
+                  </a:rPr>
                   <a:t>Step 2:</a:t>
                 </a:r>
               </a:p>
@@ -7251,10 +7237,7 @@
                 </a:pPr>
                 <a14:m>
                   <m:oMathPara xmlns:m="http://schemas.openxmlformats.org/officeDocument/2006/math">
-                    <m:oMathParaPr>
-                      <m:jc m:val="centerGroup"/>
-                    </m:oMathParaPr>
-                    <m:oMath xmlns:m="http://schemas.openxmlformats.org/officeDocument/2006/math">
+                    <m:oMath>
                       <m:r>
                         <a:rPr lang="en-US" b="0" i="1" smtClean="0">
                           <a:latin typeface="Cambria Math" panose="02040503050406030204" pitchFamily="18" charset="0"/>
@@ -7292,7 +7275,7 @@
                               <m:begChr m:val=""/>
                               <m:endChr m:val="|"/>
                               <m:ctrlPr>
-                                <a:rPr lang="en-US" b="0" i="1" smtClean="0">
+                                <a:rPr lang="en-US">
                                   <a:latin typeface="Cambria Math" panose="02040503050406030204" pitchFamily="18" charset="0"/>
                                 </a:rPr>
                               </m:ctrlPr>
@@ -7318,31 +7301,7 @@
                             <a:rPr lang="en-US" b="0" i="1" smtClean="0">
                               <a:latin typeface="Cambria Math" panose="02040503050406030204" pitchFamily="18" charset="0"/>
                             </a:rPr>
-                            <m:t>=(</m:t>
-                          </m:r>
-                          <m:r>
-                            <a:rPr lang="en-US" b="0" i="1" smtClean="0">
-                              <a:latin typeface="Cambria Math" panose="02040503050406030204" pitchFamily="18" charset="0"/>
-                            </a:rPr>
-                            <m:t>0</m:t>
-                          </m:r>
-                          <m:r>
-                            <a:rPr lang="en-US" b="0" i="1" smtClean="0">
-                              <a:latin typeface="Cambria Math" panose="02040503050406030204" pitchFamily="18" charset="0"/>
-                            </a:rPr>
-                            <m:t>,</m:t>
-                          </m:r>
-                          <m:r>
-                            <a:rPr lang="en-US" b="0" i="1" smtClean="0">
-                              <a:latin typeface="Cambria Math" panose="02040503050406030204" pitchFamily="18" charset="0"/>
-                            </a:rPr>
-                            <m:t>0</m:t>
-                          </m:r>
-                          <m:r>
-                            <a:rPr lang="en-US" b="0" i="1" smtClean="0">
-                              <a:latin typeface="Cambria Math" panose="02040503050406030204" pitchFamily="18" charset="0"/>
-                            </a:rPr>
-                            <m:t>)</m:t>
+                            <m:t>=(0,0)</m:t>
                           </m:r>
                         </m:sub>
                       </m:sSub>
@@ -7404,13 +7363,7 @@
                                   <a:rPr lang="en-US" b="0" i="1" smtClean="0">
                                     <a:latin typeface="Cambria Math" panose="02040503050406030204" pitchFamily="18" charset="0"/>
                                   </a:rPr>
-                                  <m:t>−</m:t>
-                                </m:r>
-                                <m:r>
-                                  <a:rPr lang="en-US" b="0" i="1" smtClean="0">
-                                    <a:latin typeface="Cambria Math" panose="02040503050406030204" pitchFamily="18" charset="0"/>
-                                  </a:rPr>
-                                  <m:t>1</m:t>
+                                  <m:t>−1</m:t>
                                 </m:r>
                               </m:e>
                               <m:e>
@@ -7446,23 +7399,35 @@
                     </m:oMath>
                   </m:oMathPara>
                 </a14:m>
-                <a:endParaRPr lang="en-US" dirty="0"/>
+                <a:endParaRPr lang="en-US" dirty="0">
+                  <a:latin typeface="Cambria" panose="02040503050406030204" pitchFamily="18" charset="0"/>
+                  <a:ea typeface="Cambria" panose="02040503050406030204" pitchFamily="18" charset="0"/>
+                </a:endParaRPr>
               </a:p>
               <a:p>
                 <a:pPr lvl="1"/>
-                <a:endParaRPr lang="en-US" dirty="0"/>
+                <a:endParaRPr lang="en-US" dirty="0">
+                  <a:latin typeface="Cambria" panose="02040503050406030204" pitchFamily="18" charset="0"/>
+                  <a:ea typeface="Cambria" panose="02040503050406030204" pitchFamily="18" charset="0"/>
+                </a:endParaRPr>
               </a:p>
               <a:p>
                 <a:pPr lvl="1"/>
                 <a:r>
-                  <a:rPr lang="en-US" dirty="0"/>
+                  <a:rPr lang="en-US" dirty="0">
+                    <a:latin typeface="Cambria" panose="02040503050406030204" pitchFamily="18" charset="0"/>
+                    <a:ea typeface="Cambria" panose="02040503050406030204" pitchFamily="18" charset="0"/>
+                  </a:rPr>
                   <a:t>Step 3: </a:t>
                 </a:r>
               </a:p>
               <a:p>
                 <a:pPr lvl="2"/>
                 <a:r>
-                  <a:rPr lang="en-US" dirty="0"/>
+                  <a:rPr lang="en-US" dirty="0">
+                    <a:latin typeface="Cambria" panose="02040503050406030204" pitchFamily="18" charset="0"/>
+                    <a:ea typeface="Cambria" panose="02040503050406030204" pitchFamily="18" charset="0"/>
+                  </a:rPr>
                   <a:t>Eigenvalues </a:t>
                 </a:r>
                 <a14:m>
@@ -7482,7 +7447,10 @@
                   </m:oMath>
                 </a14:m>
                 <a:r>
-                  <a:rPr lang="en-US" dirty="0"/>
+                  <a:rPr lang="en-US" dirty="0">
+                    <a:latin typeface="Cambria" panose="02040503050406030204" pitchFamily="18" charset="0"/>
+                    <a:ea typeface="Cambria" panose="02040503050406030204" pitchFamily="18" charset="0"/>
+                  </a:rPr>
                   <a:t>of </a:t>
                 </a:r>
                 <a14:m>
@@ -7496,7 +7464,10 @@
                   </m:oMath>
                 </a14:m>
                 <a:r>
-                  <a:rPr lang="en-US" dirty="0"/>
+                  <a:rPr lang="en-US" dirty="0">
+                    <a:latin typeface="Cambria" panose="02040503050406030204" pitchFamily="18" charset="0"/>
+                    <a:ea typeface="Cambria" panose="02040503050406030204" pitchFamily="18" charset="0"/>
+                  </a:rPr>
                   <a:t> satisfy </a:t>
                 </a:r>
               </a:p>
@@ -7505,7 +7476,10 @@
                   <a:buNone/>
                 </a:pPr>
                 <a:r>
-                  <a:rPr lang="en-US" b="0" dirty="0"/>
+                  <a:rPr lang="en-US" b="0" dirty="0">
+                    <a:latin typeface="Cambria" panose="02040503050406030204" pitchFamily="18" charset="0"/>
+                    <a:ea typeface="Cambria" panose="02040503050406030204" pitchFamily="18" charset="0"/>
+                  </a:rPr>
                   <a:t>	</a:t>
                 </a:r>
                 <a14:m>
@@ -7557,29 +7531,14 @@
                       <a:rPr lang="en-US" b="0" i="1" smtClean="0">
                         <a:latin typeface="Cambria Math" panose="02040503050406030204" pitchFamily="18" charset="0"/>
                       </a:rPr>
-                      <m:t>+</m:t>
-                    </m:r>
-                    <m:r>
-                      <a:rPr lang="en-US" b="0" i="1" smtClean="0">
-                        <a:latin typeface="Cambria Math" panose="02040503050406030204" pitchFamily="18" charset="0"/>
-                      </a:rPr>
-                      <m:t>1</m:t>
-                    </m:r>
-                    <m:r>
-                      <a:rPr lang="en-US" b="0" i="1" smtClean="0">
-                        <a:latin typeface="Cambria Math" panose="02040503050406030204" pitchFamily="18" charset="0"/>
-                      </a:rPr>
-                      <m:t>=</m:t>
-                    </m:r>
-                    <m:r>
-                      <a:rPr lang="en-US" b="0" i="1" smtClean="0">
-                        <a:latin typeface="Cambria Math" panose="02040503050406030204" pitchFamily="18" charset="0"/>
-                      </a:rPr>
-                      <m:t>0</m:t>
+                      <m:t>+1=0</m:t>
                     </m:r>
                   </m:oMath>
                 </a14:m>
-                <a:endParaRPr lang="en-US" dirty="0"/>
+                <a:endParaRPr lang="en-US" dirty="0">
+                  <a:latin typeface="Cambria" panose="02040503050406030204" pitchFamily="18" charset="0"/>
+                  <a:ea typeface="Cambria" panose="02040503050406030204" pitchFamily="18" charset="0"/>
+                </a:endParaRPr>
               </a:p>
               <a:p>
                 <a:pPr lvl="2"/>
@@ -7594,14 +7553,20 @@
                   </m:oMath>
                 </a14:m>
                 <a:r>
-                  <a:rPr lang="en-US" dirty="0"/>
+                  <a:rPr lang="en-US" dirty="0">
+                    <a:latin typeface="Cambria" panose="02040503050406030204" pitchFamily="18" charset="0"/>
+                    <a:ea typeface="Cambria" panose="02040503050406030204" pitchFamily="18" charset="0"/>
+                  </a:rPr>
                   <a:t> both eigenvalues have negative real parts</a:t>
                 </a:r>
               </a:p>
               <a:p>
                 <a:pPr lvl="2"/>
                 <a:r>
-                  <a:rPr lang="en-US" dirty="0"/>
+                  <a:rPr lang="en-US" dirty="0">
+                    <a:latin typeface="Cambria" panose="02040503050406030204" pitchFamily="18" charset="0"/>
+                    <a:ea typeface="Cambria" panose="02040503050406030204" pitchFamily="18" charset="0"/>
+                  </a:rPr>
                   <a:t>Pendulum is locally stable</a:t>
                 </a:r>
               </a:p>
@@ -7634,7 +7599,7 @@
               <a:blipFill>
                 <a:blip r:embed="rId3"/>
                 <a:stretch>
-                  <a:fillRect t="-2381" b="-2101"/>
+                  <a:fillRect t="-2521" b="-2101"/>
                 </a:stretch>
               </a:blipFill>
             </p:spPr>
@@ -8116,7 +8081,7 @@
                     <m:d>
                       <m:dPr>
                         <m:ctrlPr>
-                          <a:rPr lang="en-US" b="0" i="1" smtClean="0">
+                          <a:rPr lang="en-US" b="1" i="0" smtClean="0">
                             <a:latin typeface="Cambria Math" panose="02040503050406030204" pitchFamily="18" charset="0"/>
                           </a:rPr>
                         </m:ctrlPr>
@@ -8190,7 +8155,7 @@
                         <m:begChr m:val="{"/>
                         <m:endChr m:val="}"/>
                         <m:ctrlPr>
-                          <a:rPr lang="en-US" b="0" i="1" smtClean="0">
+                          <a:rPr lang="en-US" b="1" i="1" smtClean="0">
                             <a:latin typeface="Cambria Math" panose="02040503050406030204" pitchFamily="18" charset="0"/>
                           </a:rPr>
                         </m:ctrlPr>
@@ -8244,7 +8209,7 @@
                     <m:d>
                       <m:dPr>
                         <m:ctrlPr>
-                          <a:rPr lang="en-US" b="0" i="1" smtClean="0">
+                          <a:rPr lang="en-US" b="1" i="0" smtClean="0">
                             <a:latin typeface="Cambria Math" panose="02040503050406030204" pitchFamily="18" charset="0"/>
                           </a:rPr>
                         </m:ctrlPr>
@@ -8322,7 +8287,7 @@
                     <m:d>
                       <m:dPr>
                         <m:ctrlPr>
-                          <a:rPr lang="en-US" i="1">
+                          <a:rPr lang="en-US" b="1">
                             <a:latin typeface="Cambria Math" panose="02040503050406030204" pitchFamily="18" charset="0"/>
                           </a:rPr>
                         </m:ctrlPr>
@@ -8384,7 +8349,7 @@
                     <m:d>
                       <m:dPr>
                         <m:ctrlPr>
-                          <a:rPr lang="en-US" b="0" i="1" smtClean="0">
+                          <a:rPr lang="en-US" b="1" i="0" smtClean="0">
                             <a:latin typeface="Cambria Math" panose="02040503050406030204" pitchFamily="18" charset="0"/>
                           </a:rPr>
                         </m:ctrlPr>
@@ -8422,7 +8387,7 @@
                       <m:accPr>
                         <m:chr m:val="̇"/>
                         <m:ctrlPr>
-                          <a:rPr lang="en-US" b="0" i="1" smtClean="0">
+                          <a:rPr lang="en-US" b="1" i="0" smtClean="0">
                             <a:latin typeface="Cambria Math" panose="02040503050406030204" pitchFamily="18" charset="0"/>
                           </a:rPr>
                         </m:ctrlPr>
@@ -9050,10 +9015,7 @@
                 <a:pPr/>
                 <a14:m>
                   <m:oMathPara xmlns:m="http://schemas.openxmlformats.org/officeDocument/2006/math">
-                    <m:oMathParaPr>
-                      <m:jc m:val="centerGroup"/>
-                    </m:oMathParaPr>
-                    <m:oMath xmlns:m="http://schemas.openxmlformats.org/officeDocument/2006/math">
+                    <m:oMath>
                       <m:sSub>
                         <m:sSubPr>
                           <m:ctrlPr>
@@ -9165,10 +9127,7 @@
                 <a:pPr/>
                 <a14:m>
                   <m:oMathPara xmlns:m="http://schemas.openxmlformats.org/officeDocument/2006/math">
-                    <m:oMathParaPr>
-                      <m:jc m:val="centerGroup"/>
-                    </m:oMathParaPr>
-                    <m:oMath xmlns:m="http://schemas.openxmlformats.org/officeDocument/2006/math">
+                    <m:oMath>
                       <m:sSub>
                         <m:sSubPr>
                           <m:ctrlPr>
@@ -9280,10 +9239,7 @@
                 <a:pPr/>
                 <a14:m>
                   <m:oMathPara xmlns:m="http://schemas.openxmlformats.org/officeDocument/2006/math">
-                    <m:oMathParaPr>
-                      <m:jc m:val="centerGroup"/>
-                    </m:oMathParaPr>
-                    <m:oMath xmlns:m="http://schemas.openxmlformats.org/officeDocument/2006/math">
+                    <m:oMath>
                       <m:r>
                         <a:rPr lang="en-US" sz="2000" b="1" i="1" smtClean="0">
                           <a:latin typeface="Cambria Math" panose="02040503050406030204" pitchFamily="18" charset="0"/>
@@ -9450,7 +9406,7 @@
                     <m:d>
                       <m:dPr>
                         <m:ctrlPr>
-                          <a:rPr lang="en-US" b="0" i="1" smtClean="0">
+                          <a:rPr lang="en-US" b="1" i="0" smtClean="0">
                             <a:latin typeface="Cambria Math" panose="02040503050406030204" pitchFamily="18" charset="0"/>
                           </a:rPr>
                         </m:ctrlPr>
@@ -9479,7 +9435,7 @@
                     <m:d>
                       <m:dPr>
                         <m:ctrlPr>
-                          <a:rPr lang="en-US" b="0" i="1" smtClean="0">
+                          <a:rPr lang="en-US" b="1" i="0" smtClean="0">
                             <a:latin typeface="Cambria Math" panose="02040503050406030204" pitchFamily="18" charset="0"/>
                           </a:rPr>
                         </m:ctrlPr>
@@ -9525,7 +9481,7 @@
                     <m:d>
                       <m:dPr>
                         <m:ctrlPr>
-                          <a:rPr lang="en-US" b="1" i="1" smtClean="0">
+                          <a:rPr lang="en-US" b="0" i="0" smtClean="0">
                             <a:latin typeface="Cambria Math" panose="02040503050406030204" pitchFamily="18" charset="0"/>
                           </a:rPr>
                         </m:ctrlPr>
@@ -9566,7 +9522,7 @@
                       <m:accPr>
                         <m:chr m:val="̇"/>
                         <m:ctrlPr>
-                          <a:rPr lang="en-US" b="0" i="1" smtClean="0">
+                          <a:rPr lang="en-US" i="1">
                             <a:latin typeface="Cambria Math" panose="02040503050406030204" pitchFamily="18" charset="0"/>
                           </a:rPr>
                         </m:ctrlPr>
@@ -9583,7 +9539,7 @@
                     <m:d>
                       <m:dPr>
                         <m:ctrlPr>
-                          <a:rPr lang="en-US" b="0" i="1" dirty="0" smtClean="0">
+                          <a:rPr lang="en-US" b="1" i="0" dirty="0" smtClean="0">
                             <a:latin typeface="Cambria Math" panose="02040503050406030204" pitchFamily="18" charset="0"/>
                           </a:rPr>
                         </m:ctrlPr>
@@ -9643,7 +9599,7 @@
                     <m:d>
                       <m:dPr>
                         <m:ctrlPr>
-                          <a:rPr lang="en-US" i="1" dirty="0">
+                          <a:rPr lang="en-US" b="1" dirty="0">
                             <a:latin typeface="Cambria Math" panose="02040503050406030204" pitchFamily="18" charset="0"/>
                           </a:rPr>
                         </m:ctrlPr>
@@ -9673,10 +9629,7 @@
                 </a:pPr>
                 <a14:m>
                   <m:oMathPara xmlns:m="http://schemas.openxmlformats.org/officeDocument/2006/math">
-                    <m:oMathParaPr>
-                      <m:jc m:val="centerGroup"/>
-                    </m:oMathParaPr>
-                    <m:oMath xmlns:m="http://schemas.openxmlformats.org/officeDocument/2006/math">
+                    <m:oMath>
                       <m:f>
                         <m:fPr>
                           <m:ctrlPr>
@@ -9897,10 +9850,7 @@
                 <a:pPr/>
                 <a14:m>
                   <m:oMathPara xmlns:m="http://schemas.openxmlformats.org/officeDocument/2006/math">
-                    <m:oMathParaPr>
-                      <m:jc m:val="centerGroup"/>
-                    </m:oMathParaPr>
-                    <m:oMath xmlns:m="http://schemas.openxmlformats.org/officeDocument/2006/math">
+                    <m:oMath>
                       <m:r>
                         <a:rPr lang="en-US" sz="2400" b="0" i="1" smtClean="0">
                           <a:latin typeface="Cambria Math" panose="02040503050406030204" pitchFamily="18" charset="0"/>
@@ -10011,10 +9961,7 @@
                 <a:pPr/>
                 <a14:m>
                   <m:oMathPara xmlns:m="http://schemas.openxmlformats.org/officeDocument/2006/math">
-                    <m:oMathParaPr>
-                      <m:jc m:val="centerGroup"/>
-                    </m:oMathParaPr>
-                    <m:oMath xmlns:m="http://schemas.openxmlformats.org/officeDocument/2006/math">
+                    <m:oMath>
                       <m:r>
                         <a:rPr lang="en-US" sz="2400" b="0" i="1" smtClean="0">
                           <a:latin typeface="Cambria Math" panose="02040503050406030204" pitchFamily="18" charset="0"/>
@@ -10265,10 +10212,7 @@
                 <a:pPr/>
                 <a14:m>
                   <m:oMathPara xmlns:m="http://schemas.openxmlformats.org/officeDocument/2006/math">
-                    <m:oMathParaPr>
-                      <m:jc m:val="centerGroup"/>
-                    </m:oMathParaPr>
-                    <m:oMath xmlns:m="http://schemas.openxmlformats.org/officeDocument/2006/math">
+                    <m:oMath>
                       <m:r>
                         <a:rPr lang="en-US" sz="2000" b="1" i="0" smtClean="0">
                           <a:latin typeface="Cambria Math" panose="02040503050406030204" pitchFamily="18" charset="0"/>
@@ -10279,19 +10223,7 @@
                         <a:rPr lang="en-US" sz="2000" b="1" i="0" smtClean="0">
                           <a:latin typeface="Cambria Math" panose="02040503050406030204" pitchFamily="18" charset="0"/>
                         </a:rPr>
-                        <m:t>(</m:t>
-                      </m:r>
-                      <m:r>
-                        <a:rPr lang="en-US" sz="2000" b="0" i="0" smtClean="0">
-                          <a:latin typeface="Cambria Math" panose="02040503050406030204" pitchFamily="18" charset="0"/>
-                        </a:rPr>
-                        <m:t>0</m:t>
-                      </m:r>
-                      <m:r>
-                        <a:rPr lang="en-US" sz="2000" b="1" i="0" smtClean="0">
-                          <a:latin typeface="Cambria Math" panose="02040503050406030204" pitchFamily="18" charset="0"/>
-                        </a:rPr>
-                        <m:t>)</m:t>
+                        <m:t>(0)</m:t>
                       </m:r>
                     </m:oMath>
                   </m:oMathPara>
@@ -10510,10 +10442,7 @@
                 <a:pPr/>
                 <a14:m>
                   <m:oMathPara xmlns:m="http://schemas.openxmlformats.org/officeDocument/2006/math">
-                    <m:oMathParaPr>
-                      <m:jc m:val="centerGroup"/>
-                    </m:oMathParaPr>
-                    <m:oMath xmlns:m="http://schemas.openxmlformats.org/officeDocument/2006/math">
+                    <m:oMath>
                       <m:r>
                         <a:rPr lang="en-US" sz="2400" b="1">
                           <a:latin typeface="Cambria Math" panose="02040503050406030204" pitchFamily="18" charset="0"/>
@@ -10605,10 +10534,7 @@
                 <a:pPr/>
                 <a14:m>
                   <m:oMathPara xmlns:m="http://schemas.openxmlformats.org/officeDocument/2006/math">
-                    <m:oMathParaPr>
-                      <m:jc m:val="centerGroup"/>
-                    </m:oMathParaPr>
-                    <m:oMath xmlns:m="http://schemas.openxmlformats.org/officeDocument/2006/math">
+                    <m:oMath>
                       <m:r>
                         <a:rPr lang="en-US" sz="2400" b="1" i="0" smtClean="0">
                           <a:latin typeface="Cambria Math" panose="02040503050406030204" pitchFamily="18" charset="0"/>
@@ -10783,10 +10709,7 @@
                 <a:pPr/>
                 <a14:m>
                   <m:oMathPara xmlns:m="http://schemas.openxmlformats.org/officeDocument/2006/math">
-                    <m:oMathParaPr>
-                      <m:jc m:val="centerGroup"/>
-                    </m:oMathParaPr>
-                    <m:oMath xmlns:m="http://schemas.openxmlformats.org/officeDocument/2006/math">
+                    <m:oMath>
                       <m:r>
                         <a:rPr lang="en-US" sz="2400" b="0" i="1" smtClean="0">
                           <a:latin typeface="Cambria Math" panose="02040503050406030204" pitchFamily="18" charset="0"/>
@@ -10921,7 +10844,7 @@
                     <m:d>
                       <m:dPr>
                         <m:ctrlPr>
-                          <a:rPr lang="en-US" sz="2400" b="0" i="1" smtClean="0">
+                          <a:rPr lang="en-US" sz="2400" b="1" i="0" smtClean="0">
                             <a:latin typeface="Cambria Math" panose="02040503050406030204" pitchFamily="18" charset="0"/>
                           </a:rPr>
                         </m:ctrlPr>
@@ -10942,25 +10865,7 @@
                         </a:solidFill>
                         <a:latin typeface="Cambria Math" panose="02040503050406030204" pitchFamily="18" charset="0"/>
                       </a:rPr>
-                      <m:t>=(</m:t>
-                    </m:r>
-                    <m:r>
-                      <a:rPr lang="en-US" sz="2400" b="0" i="1" smtClean="0">
-                        <a:solidFill>
-                          <a:srgbClr val="FF0000"/>
-                        </a:solidFill>
-                        <a:latin typeface="Cambria Math" panose="02040503050406030204" pitchFamily="18" charset="0"/>
-                      </a:rPr>
-                      <m:t>1</m:t>
-                    </m:r>
-                    <m:r>
-                      <a:rPr lang="en-US" sz="2400" b="0" i="1" smtClean="0">
-                        <a:solidFill>
-                          <a:srgbClr val="FF0000"/>
-                        </a:solidFill>
-                        <a:latin typeface="Cambria Math" panose="02040503050406030204" pitchFamily="18" charset="0"/>
-                      </a:rPr>
-                      <m:t>−</m:t>
+                      <m:t>=(1−</m:t>
                     </m:r>
                     <m:r>
                       <m:rPr>
@@ -11220,25 +11125,7 @@
                           <a:rPr lang="en-US" sz="2400" b="0" i="1" smtClean="0">
                             <a:latin typeface="Cambria Math" panose="02040503050406030204" pitchFamily="18" charset="0"/>
                           </a:rPr>
-                          <m:t>−</m:t>
-                        </m:r>
-                        <m:r>
-                          <a:rPr lang="en-US" sz="2400" b="0" i="1" smtClean="0">
-                            <a:latin typeface="Cambria Math" panose="02040503050406030204" pitchFamily="18" charset="0"/>
-                          </a:rPr>
-                          <m:t>1</m:t>
-                        </m:r>
-                        <m:r>
-                          <a:rPr lang="en-US" sz="2400" b="0" i="1" smtClean="0">
-                            <a:latin typeface="Cambria Math" panose="02040503050406030204" pitchFamily="18" charset="0"/>
-                          </a:rPr>
-                          <m:t>,</m:t>
-                        </m:r>
-                        <m:r>
-                          <a:rPr lang="en-US" sz="2400" b="0" i="1" smtClean="0">
-                            <a:latin typeface="Cambria Math" panose="02040503050406030204" pitchFamily="18" charset="0"/>
-                          </a:rPr>
-                          <m:t>1</m:t>
+                          <m:t>−1,1</m:t>
                         </m:r>
                       </m:e>
                     </m:d>
@@ -11432,7 +11319,7 @@
                     <m:d>
                       <m:dPr>
                         <m:ctrlPr>
-                          <a:rPr lang="en-US" sz="2400" b="0" i="1" smtClean="0">
+                          <a:rPr lang="en-US" sz="2400" b="1" i="0" smtClean="0">
                             <a:latin typeface="Cambria Math" panose="02040503050406030204" pitchFamily="18" charset="0"/>
                           </a:rPr>
                         </m:ctrlPr>
@@ -11450,13 +11337,7 @@
                       <a:rPr lang="en-US" sz="2400" b="0" i="1" smtClean="0">
                         <a:latin typeface="Cambria Math" panose="02040503050406030204" pitchFamily="18" charset="0"/>
                       </a:rPr>
-                      <m:t>&gt;</m:t>
-                    </m:r>
-                    <m:r>
-                      <a:rPr lang="en-US" sz="2400" b="0" i="1" smtClean="0">
-                        <a:latin typeface="Cambria Math" panose="02040503050406030204" pitchFamily="18" charset="0"/>
-                      </a:rPr>
-                      <m:t>0</m:t>
+                      <m:t>&gt;0</m:t>
                     </m:r>
                   </m:oMath>
                 </a14:m>
@@ -11498,7 +11379,7 @@
                     <m:f>
                       <m:fPr>
                         <m:ctrlPr>
-                          <a:rPr lang="en-US" sz="2400" i="1" smtClean="0">
+                          <a:rPr lang="en-US" sz="2400" i="1">
                             <a:latin typeface="Cambria Math" panose="02040503050406030204" pitchFamily="18" charset="0"/>
                           </a:rPr>
                         </m:ctrlPr>
@@ -11541,7 +11422,7 @@
                     <m:d>
                       <m:dPr>
                         <m:ctrlPr>
-                          <a:rPr lang="en-US" sz="2400" i="1">
+                          <a:rPr lang="en-US" sz="2400" b="1">
                             <a:latin typeface="Cambria Math" panose="02040503050406030204" pitchFamily="18" charset="0"/>
                           </a:rPr>
                         </m:ctrlPr>
@@ -11597,7 +11478,7 @@
                               <m:sSub>
                                 <m:sSubPr>
                                   <m:ctrlPr>
-                                    <a:rPr lang="en-US" sz="2400" b="0" i="1" smtClean="0">
+                                    <a:rPr lang="en-US" sz="2400" i="1">
                                       <a:latin typeface="Cambria Math" panose="02040503050406030204" pitchFamily="18" charset="0"/>
                                     </a:rPr>
                                   </m:ctrlPr>
@@ -12054,7 +11935,7 @@
                     <m:sSub>
                       <m:sSubPr>
                         <m:ctrlPr>
-                          <a:rPr lang="en-US" sz="2400" i="1" strike="sngStrike" dirty="0" smtClean="0">
+                          <a:rPr lang="en-US" sz="2400" i="1" strike="sngStrike" dirty="0">
                             <a:latin typeface="Cambria Math" panose="02040503050406030204" pitchFamily="18" charset="0"/>
                           </a:rPr>
                         </m:ctrlPr>
@@ -12307,13 +12188,7 @@
                       <a:rPr lang="en-US" sz="2400" b="0" i="1" smtClean="0">
                         <a:latin typeface="Cambria Math" panose="02040503050406030204" pitchFamily="18" charset="0"/>
                       </a:rPr>
-                      <m:t>≤</m:t>
-                    </m:r>
-                    <m:r>
-                      <a:rPr lang="en-US" sz="2400" b="0" i="1" smtClean="0">
-                        <a:latin typeface="Cambria Math" panose="02040503050406030204" pitchFamily="18" charset="0"/>
-                      </a:rPr>
-                      <m:t>0</m:t>
+                      <m:t>≤0</m:t>
                     </m:r>
                   </m:oMath>
                 </a14:m>
@@ -12479,12 +12354,12 @@
         <p:spPr/>
         <p:txBody>
           <a:bodyPr>
-            <a:normAutofit fontScale="90000"/>
+            <a:noAutofit/>
           </a:bodyPr>
           <a:lstStyle/>
           <a:p>
             <a:r>
-              <a:rPr lang="en-US" dirty="0"/>
+              <a:rPr lang="en-US" sz="3200" dirty="0"/>
               <a:t>Second method for asymptotic/exponential stability</a:t>
             </a:r>
           </a:p>
@@ -12714,7 +12589,7 @@
                     <m:d>
                       <m:dPr>
                         <m:ctrlPr>
-                          <a:rPr lang="en-US" sz="2000" b="0" i="1" smtClean="0">
+                          <a:rPr lang="en-US" sz="2000" b="1" i="0" smtClean="0">
                             <a:solidFill>
                               <a:schemeClr val="bg2">
                                 <a:lumMod val="75000"/>
@@ -12747,18 +12622,7 @@
                         </a:solidFill>
                         <a:latin typeface="Cambria Math" panose="02040503050406030204" pitchFamily="18" charset="0"/>
                       </a:rPr>
-                      <m:t>&gt;</m:t>
-                    </m:r>
-                    <m:r>
-                      <a:rPr lang="en-US" sz="2000" b="0" i="1" smtClean="0">
-                        <a:solidFill>
-                          <a:schemeClr val="bg2">
-                            <a:lumMod val="75000"/>
-                          </a:schemeClr>
-                        </a:solidFill>
-                        <a:latin typeface="Cambria Math" panose="02040503050406030204" pitchFamily="18" charset="0"/>
-                      </a:rPr>
-                      <m:t>0</m:t>
+                      <m:t>&gt;0</m:t>
                     </m:r>
                   </m:oMath>
                 </a14:m>
@@ -12832,7 +12696,7 @@
                         <m:begChr m:val="{"/>
                         <m:endChr m:val="}"/>
                         <m:ctrlPr>
-                          <a:rPr lang="en-US" b="0" i="1" smtClean="0">
+                          <a:rPr lang="en-US" b="1" i="1" smtClean="0">
                             <a:latin typeface="Cambria Math" panose="02040503050406030204" pitchFamily="18" charset="0"/>
                           </a:rPr>
                         </m:ctrlPr>
@@ -12886,7 +12750,7 @@
                     <m:d>
                       <m:dPr>
                         <m:ctrlPr>
-                          <a:rPr lang="en-US" b="0" i="1" smtClean="0">
+                          <a:rPr lang="en-US" b="1" i="0" smtClean="0">
                             <a:latin typeface="Cambria Math" panose="02040503050406030204" pitchFamily="18" charset="0"/>
                           </a:rPr>
                         </m:ctrlPr>
@@ -13005,7 +12869,7 @@
                     <m:d>
                       <m:dPr>
                         <m:ctrlPr>
-                          <a:rPr lang="en-US" sz="2000" i="1">
+                          <a:rPr lang="en-US" sz="2000" b="1">
                             <a:solidFill>
                               <a:schemeClr val="bg2">
                                 <a:lumMod val="75000"/>
@@ -13038,18 +12902,7 @@
                         </a:solidFill>
                         <a:latin typeface="Cambria Math" panose="02040503050406030204" pitchFamily="18" charset="0"/>
                       </a:rPr>
-                      <m:t>=</m:t>
-                    </m:r>
-                    <m:r>
-                      <a:rPr lang="en-US" sz="2000" i="1">
-                        <a:solidFill>
-                          <a:schemeClr val="bg2">
-                            <a:lumMod val="75000"/>
-                          </a:schemeClr>
-                        </a:solidFill>
-                        <a:latin typeface="Cambria Math" panose="02040503050406030204" pitchFamily="18" charset="0"/>
-                      </a:rPr>
-                      <m:t>0</m:t>
+                      <m:t>=0</m:t>
                     </m:r>
                   </m:oMath>
                 </a14:m>
@@ -13119,7 +12972,7 @@
                     <m:d>
                       <m:dPr>
                         <m:ctrlPr>
-                          <a:rPr lang="en-US" sz="2000" b="0" i="1" smtClean="0">
+                          <a:rPr lang="en-US" sz="2000" b="1" i="0" smtClean="0">
                             <a:solidFill>
                               <a:schemeClr val="bg2">
                                 <a:lumMod val="75000"/>
@@ -13152,18 +13005,7 @@
                         </a:solidFill>
                         <a:latin typeface="Cambria Math" panose="02040503050406030204" pitchFamily="18" charset="0"/>
                       </a:rPr>
-                      <m:t>=</m:t>
-                    </m:r>
-                    <m:r>
-                      <a:rPr lang="en-US" sz="2000" b="0" i="1" smtClean="0">
-                        <a:solidFill>
-                          <a:schemeClr val="bg2">
-                            <a:lumMod val="75000"/>
-                          </a:schemeClr>
-                        </a:solidFill>
-                        <a:latin typeface="Cambria Math" panose="02040503050406030204" pitchFamily="18" charset="0"/>
-                      </a:rPr>
-                      <m:t>0</m:t>
+                      <m:t>=0</m:t>
                     </m:r>
                   </m:oMath>
                 </a14:m>
@@ -13195,7 +13037,7 @@
                       <m:accPr>
                         <m:chr m:val="̇"/>
                         <m:ctrlPr>
-                          <a:rPr lang="en-US" sz="2400" b="0" i="1" smtClean="0">
+                          <a:rPr lang="en-US" sz="2400" b="1" i="0" smtClean="0">
                             <a:solidFill>
                               <a:schemeClr val="bg2">
                                 <a:lumMod val="75000"/>
@@ -13390,7 +13232,7 @@
                         <m:begChr m:val="{"/>
                         <m:endChr m:val="}"/>
                         <m:ctrlPr>
-                          <a:rPr lang="en-US" i="1">
+                          <a:rPr lang="en-US" b="1" i="1">
                             <a:latin typeface="Cambria Math" panose="02040503050406030204" pitchFamily="18" charset="0"/>
                           </a:rPr>
                         </m:ctrlPr>
@@ -13444,7 +13286,7 @@
                     <m:d>
                       <m:dPr>
                         <m:ctrlPr>
-                          <a:rPr lang="en-US" i="1">
+                          <a:rPr lang="en-US" b="1">
                             <a:latin typeface="Cambria Math" panose="02040503050406030204" pitchFamily="18" charset="0"/>
                           </a:rPr>
                         </m:ctrlPr>
@@ -13533,7 +13375,7 @@
                         <m:begChr m:val="{"/>
                         <m:endChr m:val="}"/>
                         <m:ctrlPr>
-                          <a:rPr lang="en-US" i="1">
+                          <a:rPr lang="en-US" b="1" i="1">
                             <a:latin typeface="Cambria Math" panose="02040503050406030204" pitchFamily="18" charset="0"/>
                           </a:rPr>
                         </m:ctrlPr>
@@ -13587,7 +13429,7 @@
                     <m:d>
                       <m:dPr>
                         <m:ctrlPr>
-                          <a:rPr lang="en-US" i="1">
+                          <a:rPr lang="en-US" b="1">
                             <a:latin typeface="Cambria Math" panose="02040503050406030204" pitchFamily="18" charset="0"/>
                           </a:rPr>
                         </m:ctrlPr>
@@ -13698,7 +13540,7 @@
                         <m:begChr m:val="{"/>
                         <m:endChr m:val="}"/>
                         <m:ctrlPr>
-                          <a:rPr lang="en-US" i="1">
+                          <a:rPr lang="en-US" b="1" i="1">
                             <a:latin typeface="Cambria Math" panose="02040503050406030204" pitchFamily="18" charset="0"/>
                           </a:rPr>
                         </m:ctrlPr>
@@ -13752,7 +13594,7 @@
                     <m:d>
                       <m:dPr>
                         <m:ctrlPr>
-                          <a:rPr lang="en-US" i="1">
+                          <a:rPr lang="en-US" b="1">
                             <a:latin typeface="Cambria Math" panose="02040503050406030204" pitchFamily="18" charset="0"/>
                           </a:rPr>
                         </m:ctrlPr>
@@ -15210,15 +15052,12 @@
                 <a:pPr algn="ctr"/>
                 <a14:m>
                   <m:oMathPara xmlns:m="http://schemas.openxmlformats.org/officeDocument/2006/math">
-                    <m:oMathParaPr>
-                      <m:jc m:val="centerGroup"/>
-                    </m:oMathParaPr>
-                    <m:oMath xmlns:m="http://schemas.openxmlformats.org/officeDocument/2006/math">
+                    <m:oMath>
                       <m:acc>
                         <m:accPr>
                           <m:chr m:val="̇"/>
                           <m:ctrlPr>
-                            <a:rPr lang="en-US" b="0" i="1" smtClean="0">
+                            <a:rPr lang="en-US" b="1" i="0" smtClean="0">
                               <a:latin typeface="Cambria Math" panose="02040503050406030204" pitchFamily="18" charset="0"/>
                             </a:rPr>
                           </m:ctrlPr>
@@ -15414,15 +15253,12 @@
                 <a:pPr algn="ctr"/>
                 <a14:m>
                   <m:oMathPara xmlns:m="http://schemas.openxmlformats.org/officeDocument/2006/math">
-                    <m:oMathParaPr>
-                      <m:jc m:val="centerGroup"/>
-                    </m:oMathParaPr>
-                    <m:oMath xmlns:m="http://schemas.openxmlformats.org/officeDocument/2006/math">
+                    <m:oMath>
                       <m:acc>
                         <m:accPr>
                           <m:chr m:val="̇"/>
                           <m:ctrlPr>
-                            <a:rPr lang="en-US" i="1" smtClean="0">
+                            <a:rPr lang="en-US" b="1">
                               <a:latin typeface="Cambria Math" panose="02040503050406030204" pitchFamily="18" charset="0"/>
                             </a:rPr>
                           </m:ctrlPr>
@@ -15801,10 +15637,7 @@
                 <a:pPr/>
                 <a14:m>
                   <m:oMathPara xmlns:m="http://schemas.openxmlformats.org/officeDocument/2006/math">
-                    <m:oMathParaPr>
-                      <m:jc m:val="centerGroup"/>
-                    </m:oMathParaPr>
-                    <m:oMath xmlns:m="http://schemas.openxmlformats.org/officeDocument/2006/math">
+                    <m:oMath>
                       <m:sSub>
                         <m:sSubPr>
                           <m:ctrlPr>
@@ -15953,10 +15786,7 @@
                 <a:pPr/>
                 <a14:m>
                   <m:oMathPara xmlns:m="http://schemas.openxmlformats.org/officeDocument/2006/math">
-                    <m:oMathParaPr>
-                      <m:jc m:val="centerGroup"/>
-                    </m:oMathParaPr>
-                    <m:oMath xmlns:m="http://schemas.openxmlformats.org/officeDocument/2006/math">
+                    <m:oMath>
                       <m:sSub>
                         <m:sSubPr>
                           <m:ctrlPr>
@@ -16335,10 +16165,7 @@
                   <a:pPr/>
                   <a14:m>
                     <m:oMathPara xmlns:m="http://schemas.openxmlformats.org/officeDocument/2006/math">
-                      <m:oMathParaPr>
-                        <m:jc m:val="centerGroup"/>
-                      </m:oMathParaPr>
-                      <m:oMath xmlns:m="http://schemas.openxmlformats.org/officeDocument/2006/math">
+                      <m:oMath>
                         <m:sSub>
                           <m:sSubPr>
                             <m:ctrlPr>
@@ -16368,13 +16195,7 @@
                           <a:rPr lang="en-US" b="0" i="1" smtClean="0">
                             <a:latin typeface="Cambria Math" panose="02040503050406030204" pitchFamily="18" charset="0"/>
                           </a:rPr>
-                          <m:t>=</m:t>
-                        </m:r>
-                        <m:r>
-                          <a:rPr lang="en-US" b="0" i="1" smtClean="0">
-                            <a:latin typeface="Cambria Math" panose="02040503050406030204" pitchFamily="18" charset="0"/>
-                          </a:rPr>
-                          <m:t>5</m:t>
+                          <m:t>=5</m:t>
                         </m:r>
                         <m:sSub>
                           <m:sSubPr>
@@ -16501,10 +16322,7 @@
                 <a:pPr/>
                 <a14:m>
                   <m:oMathPara xmlns:m="http://schemas.openxmlformats.org/officeDocument/2006/math">
-                    <m:oMathParaPr>
-                      <m:jc m:val="centerGroup"/>
-                    </m:oMathParaPr>
-                    <m:oMath xmlns:m="http://schemas.openxmlformats.org/officeDocument/2006/math">
+                    <m:oMath>
                       <m:sSub>
                         <m:sSubPr>
                           <m:ctrlPr>
@@ -16534,25 +16352,7 @@
                         <a:rPr lang="en-US" b="0" i="1" smtClean="0">
                           <a:latin typeface="Cambria Math" panose="02040503050406030204" pitchFamily="18" charset="0"/>
                         </a:rPr>
-                        <m:t>=−</m:t>
-                      </m:r>
-                      <m:r>
-                        <a:rPr lang="en-US" b="0" i="1" smtClean="0">
-                          <a:latin typeface="Cambria Math" panose="02040503050406030204" pitchFamily="18" charset="0"/>
-                        </a:rPr>
-                        <m:t>0</m:t>
-                      </m:r>
-                      <m:r>
-                        <a:rPr lang="en-US" b="0" i="1" smtClean="0">
-                          <a:latin typeface="Cambria Math" panose="02040503050406030204" pitchFamily="18" charset="0"/>
-                        </a:rPr>
-                        <m:t>.</m:t>
-                      </m:r>
-                      <m:r>
-                        <a:rPr lang="en-US" b="0" i="1" smtClean="0">
-                          <a:latin typeface="Cambria Math" panose="02040503050406030204" pitchFamily="18" charset="0"/>
-                        </a:rPr>
-                        <m:t>2</m:t>
+                        <m:t>=−0.2</m:t>
                       </m:r>
                       <m:sSub>
                         <m:sSubPr>
@@ -16779,10 +16579,7 @@
                 <a:pPr/>
                 <a14:m>
                   <m:oMathPara xmlns:m="http://schemas.openxmlformats.org/officeDocument/2006/math">
-                    <m:oMathParaPr>
-                      <m:jc m:val="centerGroup"/>
-                    </m:oMathParaPr>
-                    <m:oMath xmlns:m="http://schemas.openxmlformats.org/officeDocument/2006/math">
+                    <m:oMath>
                       <m:sSub>
                         <m:sSubPr>
                           <m:ctrlPr>
@@ -16926,10 +16723,7 @@
                 <a:pPr/>
                 <a14:m>
                   <m:oMathPara xmlns:m="http://schemas.openxmlformats.org/officeDocument/2006/math">
-                    <m:oMathParaPr>
-                      <m:jc m:val="centerGroup"/>
-                    </m:oMathParaPr>
-                    <m:oMath xmlns:m="http://schemas.openxmlformats.org/officeDocument/2006/math">
+                    <m:oMath>
                       <m:sSub>
                         <m:sSubPr>
                           <m:ctrlPr>
@@ -17201,8 +16995,8 @@
           <a:chExt cx="0" cy="0"/>
         </a:xfrm>
       </p:grpSpPr>
-      <mc:AlternateContent xmlns:mc="http://schemas.openxmlformats.org/markup-compatibility/2006">
-        <mc:Choice xmlns:a14="http://schemas.microsoft.com/office/drawing/2010/main" Requires="a14">
+      <mc:AlternateContent xmlns:mc="http://schemas.openxmlformats.org/markup-compatibility/2006" xmlns:a14="http://schemas.microsoft.com/office/drawing/2010/main">
+        <mc:Choice Requires="a14">
           <p:sp>
             <p:nvSpPr>
               <p:cNvPr id="2" name="Content Placeholder 1">
@@ -17272,7 +17066,7 @@
                       <m:accPr>
                         <m:chr m:val="̇"/>
                         <m:ctrlPr>
-                          <a:rPr lang="en-US" b="0" i="1" smtClean="0">
+                          <a:rPr lang="en-US" b="1" i="0" smtClean="0">
                             <a:latin typeface="Cambria Math" panose="02040503050406030204" pitchFamily="18" charset="0"/>
                           </a:rPr>
                         </m:ctrlPr>
@@ -17320,7 +17114,7 @@
                     <m:d>
                       <m:dPr>
                         <m:ctrlPr>
-                          <a:rPr lang="en-US" b="0" i="1" dirty="0" smtClean="0">
+                          <a:rPr lang="en-US" b="1" i="0" dirty="0" smtClean="0">
                             <a:latin typeface="Cambria Math" panose="02040503050406030204" pitchFamily="18" charset="0"/>
                           </a:rPr>
                         </m:ctrlPr>
@@ -17351,7 +17145,7 @@
                     <m:d>
                       <m:dPr>
                         <m:ctrlPr>
-                          <a:rPr lang="en-US" b="0" i="1" dirty="0" smtClean="0">
+                          <a:rPr lang="en-US" b="1" i="0" dirty="0" smtClean="0">
                             <a:latin typeface="Cambria Math" panose="02040503050406030204" pitchFamily="18" charset="0"/>
                           </a:rPr>
                         </m:ctrlPr>
@@ -17394,7 +17188,7 @@
                     <m:sSub>
                       <m:sSubPr>
                         <m:ctrlPr>
-                          <a:rPr lang="en-US" b="0" i="1" smtClean="0">
+                          <a:rPr lang="en-US" b="1" i="0" smtClean="0">
                             <a:latin typeface="Cambria Math" panose="02040503050406030204" pitchFamily="18" charset="0"/>
                           </a:rPr>
                         </m:ctrlPr>
@@ -17493,7 +17287,7 @@
                     <m:d>
                       <m:dPr>
                         <m:ctrlPr>
-                          <a:rPr lang="en-US" b="0" i="1" smtClean="0">
+                          <a:rPr lang="en-US" b="1" i="0" smtClean="0">
                             <a:latin typeface="Cambria Math" panose="02040503050406030204" pitchFamily="18" charset="0"/>
                           </a:rPr>
                         </m:ctrlPr>
@@ -17530,7 +17324,7 @@
                     <m:sSub>
                       <m:sSubPr>
                         <m:ctrlPr>
-                          <a:rPr lang="en-US" b="0" i="1" smtClean="0">
+                          <a:rPr lang="en-US" b="1" i="0" smtClean="0">
                             <a:latin typeface="Cambria Math" panose="02040503050406030204" pitchFamily="18" charset="0"/>
                           </a:rPr>
                         </m:ctrlPr>
@@ -17573,7 +17367,7 @@
                     <m:d>
                       <m:dPr>
                         <m:ctrlPr>
-                          <a:rPr lang="en-US" b="0" i="1" smtClean="0">
+                          <a:rPr lang="en-US" b="1" i="0" smtClean="0">
                             <a:latin typeface="Cambria Math" panose="02040503050406030204" pitchFamily="18" charset="0"/>
                           </a:rPr>
                         </m:ctrlPr>
@@ -17696,7 +17490,7 @@
             </p:txBody>
           </p:sp>
         </mc:Choice>
-        <mc:Fallback>
+        <mc:Fallback xmlns="">
           <p:sp>
             <p:nvSpPr>
               <p:cNvPr id="2" name="Content Placeholder 1">
@@ -17961,7 +17755,7 @@
                         <m:begChr m:val="‖"/>
                         <m:endChr m:val="‖"/>
                         <m:ctrlPr>
-                          <a:rPr lang="en-US" b="0" i="1" smtClean="0">
+                          <a:rPr lang="en-US" b="1" i="0" smtClean="0">
                             <a:latin typeface="Cambria Math" panose="02040503050406030204" pitchFamily="18" charset="0"/>
                           </a:rPr>
                         </m:ctrlPr>
@@ -17976,7 +17770,7 @@
                         <m:d>
                           <m:dPr>
                             <m:ctrlPr>
-                              <a:rPr lang="en-US" b="0" i="1" smtClean="0">
+                              <a:rPr lang="en-US" b="0" i="0" smtClean="0">
                                 <a:latin typeface="Cambria Math" panose="02040503050406030204" pitchFamily="18" charset="0"/>
                               </a:rPr>
                             </m:ctrlPr>
@@ -18694,10 +18488,7 @@
                 <a:pPr/>
                 <a14:m>
                   <m:oMathPara xmlns:m="http://schemas.openxmlformats.org/officeDocument/2006/math">
-                    <m:oMathParaPr>
-                      <m:jc m:val="centerGroup"/>
-                    </m:oMathParaPr>
-                    <m:oMath xmlns:m="http://schemas.openxmlformats.org/officeDocument/2006/math">
+                    <m:oMath>
                       <m:r>
                         <a:rPr lang="en-US" i="1" dirty="0" smtClean="0">
                           <a:latin typeface="Cambria Math" panose="02040503050406030204" pitchFamily="18" charset="0"/>
@@ -18790,10 +18581,7 @@
                 <a:pPr/>
                 <a14:m>
                   <m:oMathPara xmlns:m="http://schemas.openxmlformats.org/officeDocument/2006/math">
-                    <m:oMathParaPr>
-                      <m:jc m:val="centerGroup"/>
-                    </m:oMathParaPr>
-                    <m:oMath xmlns:m="http://schemas.openxmlformats.org/officeDocument/2006/math">
+                    <m:oMath>
                       <m:r>
                         <a:rPr lang="en-US" b="0" i="1" dirty="0" smtClean="0">
                           <a:latin typeface="Cambria Math" panose="02040503050406030204" pitchFamily="18" charset="0"/>
@@ -19063,10 +18851,7 @@
                   <a:pPr/>
                   <a14:m>
                     <m:oMathPara xmlns:m="http://schemas.openxmlformats.org/officeDocument/2006/math">
-                      <m:oMathParaPr>
-                        <m:jc m:val="centerGroup"/>
-                      </m:oMathParaPr>
-                      <m:oMath xmlns:m="http://schemas.openxmlformats.org/officeDocument/2006/math">
+                      <m:oMath>
                         <m:r>
                           <a:rPr lang="en-US" i="1" dirty="0" smtClean="0">
                             <a:latin typeface="Cambria Math" panose="02040503050406030204" pitchFamily="18" charset="0"/>
@@ -19314,10 +19099,7 @@
                   <a:pPr/>
                   <a14:m>
                     <m:oMathPara xmlns:m="http://schemas.openxmlformats.org/officeDocument/2006/math">
-                      <m:oMathParaPr>
-                        <m:jc m:val="centerGroup"/>
-                      </m:oMathParaPr>
-                      <m:oMath xmlns:m="http://schemas.openxmlformats.org/officeDocument/2006/math">
+                      <m:oMath>
                         <m:r>
                           <a:rPr lang="en-US" b="0" i="1" dirty="0" smtClean="0">
                             <a:latin typeface="Cambria Math" panose="02040503050406030204" pitchFamily="18" charset="0"/>
@@ -19546,10 +19328,7 @@
                   <a:pPr/>
                   <a14:m>
                     <m:oMathPara xmlns:m="http://schemas.openxmlformats.org/officeDocument/2006/math">
-                      <m:oMathParaPr>
-                        <m:jc m:val="centerGroup"/>
-                      </m:oMathParaPr>
-                      <m:oMath xmlns:m="http://schemas.openxmlformats.org/officeDocument/2006/math">
+                      <m:oMath>
                         <m:r>
                           <a:rPr lang="en-US" i="1" dirty="0" smtClean="0">
                             <a:latin typeface="Cambria Math" panose="02040503050406030204" pitchFamily="18" charset="0"/>
@@ -19684,10 +19463,7 @@
                   <a:pPr/>
                   <a14:m>
                     <m:oMathPara xmlns:m="http://schemas.openxmlformats.org/officeDocument/2006/math">
-                      <m:oMathParaPr>
-                        <m:jc m:val="centerGroup"/>
-                      </m:oMathParaPr>
-                      <m:oMath xmlns:m="http://schemas.openxmlformats.org/officeDocument/2006/math">
+                      <m:oMath>
                         <m:r>
                           <a:rPr lang="en-US" b="0" i="1" dirty="0" smtClean="0">
                             <a:latin typeface="Cambria Math" panose="02040503050406030204" pitchFamily="18" charset="0"/>
@@ -19916,10 +19692,7 @@
                   <a:pPr/>
                   <a14:m>
                     <m:oMathPara xmlns:m="http://schemas.openxmlformats.org/officeDocument/2006/math">
-                      <m:oMathParaPr>
-                        <m:jc m:val="centerGroup"/>
-                      </m:oMathParaPr>
-                      <m:oMath xmlns:m="http://schemas.openxmlformats.org/officeDocument/2006/math">
+                      <m:oMath>
                         <m:r>
                           <a:rPr lang="en-US" i="1" dirty="0" smtClean="0">
                             <a:latin typeface="Cambria Math" panose="02040503050406030204" pitchFamily="18" charset="0"/>
@@ -20054,10 +19827,7 @@
                   <a:pPr/>
                   <a14:m>
                     <m:oMathPara xmlns:m="http://schemas.openxmlformats.org/officeDocument/2006/math">
-                      <m:oMathParaPr>
-                        <m:jc m:val="centerGroup"/>
-                      </m:oMathParaPr>
-                      <m:oMath xmlns:m="http://schemas.openxmlformats.org/officeDocument/2006/math">
+                      <m:oMath>
                         <m:r>
                           <a:rPr lang="en-US" b="0" i="1" dirty="0" smtClean="0">
                             <a:latin typeface="Cambria Math" panose="02040503050406030204" pitchFamily="18" charset="0"/>
@@ -20373,10 +20143,7 @@
                   <a:pPr/>
                   <a14:m>
                     <m:oMathPara xmlns:m="http://schemas.openxmlformats.org/officeDocument/2006/math">
-                      <m:oMathParaPr>
-                        <m:jc m:val="centerGroup"/>
-                      </m:oMathParaPr>
-                      <m:oMath xmlns:m="http://schemas.openxmlformats.org/officeDocument/2006/math">
+                      <m:oMath>
                         <m:r>
                           <a:rPr lang="en-US" i="1" dirty="0" smtClean="0">
                             <a:latin typeface="Cambria Math" panose="02040503050406030204" pitchFamily="18" charset="0"/>
@@ -20511,10 +20278,7 @@
                   <a:pPr/>
                   <a14:m>
                     <m:oMathPara xmlns:m="http://schemas.openxmlformats.org/officeDocument/2006/math">
-                      <m:oMathParaPr>
-                        <m:jc m:val="centerGroup"/>
-                      </m:oMathParaPr>
-                      <m:oMath xmlns:m="http://schemas.openxmlformats.org/officeDocument/2006/math">
+                      <m:oMath>
                         <m:r>
                           <a:rPr lang="en-US" b="0" i="1" dirty="0" smtClean="0">
                             <a:latin typeface="Cambria Math" panose="02040503050406030204" pitchFamily="18" charset="0"/>
@@ -21293,8 +21057,8 @@
           <a:chExt cx="0" cy="0"/>
         </a:xfrm>
       </p:grpSpPr>
-      <mc:AlternateContent xmlns:mc="http://schemas.openxmlformats.org/markup-compatibility/2006">
-        <mc:Choice xmlns:a14="http://schemas.microsoft.com/office/drawing/2010/main" Requires="a14">
+      <mc:AlternateContent xmlns:mc="http://schemas.openxmlformats.org/markup-compatibility/2006" xmlns:a14="http://schemas.microsoft.com/office/drawing/2010/main">
+        <mc:Choice Requires="a14">
           <p:sp>
             <p:nvSpPr>
               <p:cNvPr id="2" name="Content Placeholder 1">
@@ -21458,10 +21222,7 @@
                 </a:pPr>
                 <a14:m>
                   <m:oMathPara xmlns:m="http://schemas.openxmlformats.org/officeDocument/2006/math">
-                    <m:oMathParaPr>
-                      <m:jc m:val="centerGroup"/>
-                    </m:oMathParaPr>
-                    <m:oMath xmlns:m="http://schemas.openxmlformats.org/officeDocument/2006/math">
+                    <m:oMath>
                       <m:r>
                         <a:rPr lang="en-US" b="0" i="1" smtClean="0">
                           <a:latin typeface="Cambria Math" panose="02040503050406030204" pitchFamily="18" charset="0"/>
@@ -21674,7 +21435,7 @@
             </p:txBody>
           </p:sp>
         </mc:Choice>
-        <mc:Fallback>
+        <mc:Fallback xmlns="">
           <p:sp>
             <p:nvSpPr>
               <p:cNvPr id="2" name="Content Placeholder 1">
@@ -21931,7 +21692,7 @@
                       <m:accPr>
                         <m:chr m:val="̇"/>
                         <m:ctrlPr>
-                          <a:rPr lang="en-US" i="1">
+                          <a:rPr lang="en-US" b="1">
                             <a:latin typeface="Cambria Math" panose="02040503050406030204" pitchFamily="18" charset="0"/>
                           </a:rPr>
                         </m:ctrlPr>
@@ -21960,7 +21721,7 @@
                     <m:d>
                       <m:dPr>
                         <m:ctrlPr>
-                          <a:rPr lang="en-US" i="1" dirty="0">
+                          <a:rPr lang="en-US" b="1" dirty="0">
                             <a:latin typeface="Cambria Math" panose="02040503050406030204" pitchFamily="18" charset="0"/>
                           </a:rPr>
                         </m:ctrlPr>
@@ -21994,7 +21755,7 @@
                     <m:d>
                       <m:dPr>
                         <m:ctrlPr>
-                          <a:rPr lang="en-US" b="0" i="1" smtClean="0">
+                          <a:rPr lang="en-US" b="1" i="0" smtClean="0">
                             <a:latin typeface="Cambria Math" panose="02040503050406030204" pitchFamily="18" charset="0"/>
                           </a:rPr>
                         </m:ctrlPr>
@@ -22019,7 +21780,7 @@
                     <m:sSup>
                       <m:sSupPr>
                         <m:ctrlPr>
-                          <a:rPr lang="en-US" b="1" i="1" smtClean="0">
+                          <a:rPr lang="en-US" b="1" i="0" smtClean="0">
                             <a:latin typeface="Cambria Math" panose="02040503050406030204" pitchFamily="18" charset="0"/>
                           </a:rPr>
                         </m:ctrlPr>
@@ -22061,7 +21822,7 @@
                     <m:sSup>
                       <m:sSupPr>
                         <m:ctrlPr>
-                          <a:rPr lang="en-US" b="1" i="1" smtClean="0">
+                          <a:rPr lang="en-US" b="1" i="0" smtClean="0">
                             <a:latin typeface="Cambria Math" panose="02040503050406030204" pitchFamily="18" charset="0"/>
                           </a:rPr>
                         </m:ctrlPr>
@@ -22112,13 +21873,7 @@
                       <a:rPr lang="en-US" sz="2800" b="0" i="1" smtClean="0">
                         <a:latin typeface="Cambria Math" panose="02040503050406030204" pitchFamily="18" charset="0"/>
                       </a:rPr>
-                      <m:t>&gt;</m:t>
-                    </m:r>
-                    <m:r>
-                      <a:rPr lang="en-US" sz="2800" b="0" i="1" smtClean="0">
-                        <a:latin typeface="Cambria Math" panose="02040503050406030204" pitchFamily="18" charset="0"/>
-                      </a:rPr>
-                      <m:t>0</m:t>
+                      <m:t>&gt;0</m:t>
                     </m:r>
                   </m:oMath>
                 </a14:m>
@@ -22145,13 +21900,7 @@
                       <a:rPr lang="en-US" sz="2800" b="0" i="0" smtClean="0">
                         <a:latin typeface="Cambria Math" panose="02040503050406030204" pitchFamily="18" charset="0"/>
                       </a:rPr>
-                      <m:t>&gt;</m:t>
-                    </m:r>
-                    <m:r>
-                      <a:rPr lang="en-US" sz="2800" b="0" i="0" smtClean="0">
-                        <a:latin typeface="Cambria Math" panose="02040503050406030204" pitchFamily="18" charset="0"/>
-                      </a:rPr>
-                      <m:t>0</m:t>
+                      <m:t>&gt;0</m:t>
                     </m:r>
                   </m:oMath>
                 </a14:m>
@@ -22173,7 +21922,7 @@
                         <m:begChr m:val="‖"/>
                         <m:endChr m:val="‖"/>
                         <m:ctrlPr>
-                          <a:rPr lang="en-US" sz="2800" b="0" i="1" smtClean="0">
+                          <a:rPr lang="en-US" sz="2800" b="1" i="0" smtClean="0">
                             <a:latin typeface="Cambria Math" panose="02040503050406030204" pitchFamily="18" charset="0"/>
                           </a:rPr>
                         </m:ctrlPr>
@@ -22188,7 +21937,7 @@
                         <m:d>
                           <m:dPr>
                             <m:ctrlPr>
-                              <a:rPr lang="en-US" sz="2800" b="1" i="1" smtClean="0">
+                              <a:rPr lang="en-US" sz="2800" b="0" i="0" smtClean="0">
                                 <a:latin typeface="Cambria Math" panose="02040503050406030204" pitchFamily="18" charset="0"/>
                               </a:rPr>
                             </m:ctrlPr>
@@ -22211,7 +21960,7 @@
                         <m:sSup>
                           <m:sSupPr>
                             <m:ctrlPr>
-                              <a:rPr lang="en-US" sz="2800" b="1" i="1" smtClean="0">
+                              <a:rPr lang="en-US" sz="2800" b="1" i="0" smtClean="0">
                                 <a:latin typeface="Cambria Math" panose="02040503050406030204" pitchFamily="18" charset="0"/>
                               </a:rPr>
                             </m:ctrlPr>
@@ -22282,19 +22031,7 @@
                       <a:rPr lang="en-US" sz="2800" b="0" i="1" smtClean="0">
                         <a:latin typeface="Cambria Math" panose="02040503050406030204" pitchFamily="18" charset="0"/>
                       </a:rPr>
-                      <m:t>≥</m:t>
-                    </m:r>
-                    <m:r>
-                      <a:rPr lang="en-US" sz="2800" b="0" i="1" smtClean="0">
-                        <a:latin typeface="Cambria Math" panose="02040503050406030204" pitchFamily="18" charset="0"/>
-                      </a:rPr>
-                      <m:t>0</m:t>
-                    </m:r>
-                    <m:r>
-                      <a:rPr lang="en-US" sz="2800" b="0" i="1" smtClean="0">
-                        <a:latin typeface="Cambria Math" panose="02040503050406030204" pitchFamily="18" charset="0"/>
-                      </a:rPr>
-                      <m:t>,</m:t>
+                      <m:t>≥0,</m:t>
                     </m:r>
                   </m:oMath>
                 </a14:m>
@@ -22309,7 +22046,7 @@
                         <m:begChr m:val="‖"/>
                         <m:endChr m:val="‖"/>
                         <m:ctrlPr>
-                          <a:rPr lang="en-US" sz="2800" b="0" i="1" smtClean="0">
+                          <a:rPr lang="en-US" sz="2800" b="1" i="0" smtClean="0">
                             <a:latin typeface="Cambria Math" panose="02040503050406030204" pitchFamily="18" charset="0"/>
                           </a:rPr>
                         </m:ctrlPr>
@@ -22347,7 +22084,7 @@
                         <m:sSup>
                           <m:sSupPr>
                             <m:ctrlPr>
-                              <a:rPr lang="en-US" sz="2800" b="0" i="1" smtClean="0">
+                              <a:rPr lang="en-US" sz="2800" b="1" i="0" smtClean="0">
                                 <a:latin typeface="Cambria Math" panose="02040503050406030204" pitchFamily="18" charset="0"/>
                               </a:rPr>
                             </m:ctrlPr>
@@ -22642,14 +22379,11 @@
                 <a:pPr/>
                 <a14:m>
                   <m:oMathPara xmlns:m="http://schemas.openxmlformats.org/officeDocument/2006/math">
-                    <m:oMathParaPr>
-                      <m:jc m:val="centerGroup"/>
-                    </m:oMathParaPr>
-                    <m:oMath xmlns:m="http://schemas.openxmlformats.org/officeDocument/2006/math">
+                    <m:oMath>
                       <m:sSup>
                         <m:sSupPr>
                           <m:ctrlPr>
-                            <a:rPr lang="en-US" sz="3600" b="0" i="1" smtClean="0">
+                            <a:rPr lang="en-US" sz="3600" b="1" i="0" smtClean="0">
                               <a:latin typeface="Cambria Math" panose="02040503050406030204" pitchFamily="18" charset="0"/>
                             </a:rPr>
                           </m:ctrlPr>
@@ -23462,10 +23196,7 @@
                 <a:pPr/>
                 <a14:m>
                   <m:oMathPara xmlns:m="http://schemas.openxmlformats.org/officeDocument/2006/math">
-                    <m:oMathParaPr>
-                      <m:jc m:val="centerGroup"/>
-                    </m:oMathParaPr>
-                    <m:oMath xmlns:m="http://schemas.openxmlformats.org/officeDocument/2006/math">
+                    <m:oMath>
                       <m:r>
                         <a:rPr lang="en-US" sz="3600" b="1" i="0" smtClean="0">
                           <a:latin typeface="Cambria Math" panose="02040503050406030204" pitchFamily="18" charset="0"/>
@@ -23476,19 +23207,7 @@
                         <a:rPr lang="en-US" sz="3600" b="0" i="1" smtClean="0">
                           <a:latin typeface="Cambria Math" panose="02040503050406030204" pitchFamily="18" charset="0"/>
                         </a:rPr>
-                        <m:t>(</m:t>
-                      </m:r>
-                      <m:r>
-                        <a:rPr lang="en-US" sz="3600" b="0" i="1" smtClean="0">
-                          <a:latin typeface="Cambria Math" panose="02040503050406030204" pitchFamily="18" charset="0"/>
-                        </a:rPr>
-                        <m:t>0</m:t>
-                      </m:r>
-                      <m:r>
-                        <a:rPr lang="en-US" sz="3600" b="0" i="1" smtClean="0">
-                          <a:latin typeface="Cambria Math" panose="02040503050406030204" pitchFamily="18" charset="0"/>
-                        </a:rPr>
-                        <m:t>)</m:t>
+                        <m:t>(0)</m:t>
                       </m:r>
                     </m:oMath>
                   </m:oMathPara>
@@ -23765,7 +23484,7 @@
                       <m:accPr>
                         <m:chr m:val="̇"/>
                         <m:ctrlPr>
-                          <a:rPr lang="en-US" i="1">
+                          <a:rPr lang="en-US" b="1">
                             <a:latin typeface="Cambria Math" panose="02040503050406030204" pitchFamily="18" charset="0"/>
                           </a:rPr>
                         </m:ctrlPr>
@@ -23794,7 +23513,7 @@
                     <m:d>
                       <m:dPr>
                         <m:ctrlPr>
-                          <a:rPr lang="en-US" i="1" dirty="0">
+                          <a:rPr lang="en-US" b="1" dirty="0">
                             <a:latin typeface="Cambria Math" panose="02040503050406030204" pitchFamily="18" charset="0"/>
                           </a:rPr>
                         </m:ctrlPr>
@@ -23822,7 +23541,7 @@
                     <m:sSup>
                       <m:sSupPr>
                         <m:ctrlPr>
-                          <a:rPr lang="en-US" b="1" i="1">
+                          <a:rPr lang="en-US" b="1">
                             <a:latin typeface="Cambria Math" panose="02040503050406030204" pitchFamily="18" charset="0"/>
                           </a:rPr>
                         </m:ctrlPr>
@@ -23870,7 +23589,7 @@
                     <m:sSup>
                       <m:sSupPr>
                         <m:ctrlPr>
-                          <a:rPr lang="en-US" b="1" i="1">
+                          <a:rPr lang="en-US" b="1">
                             <a:latin typeface="Cambria Math" panose="02040503050406030204" pitchFamily="18" charset="0"/>
                           </a:rPr>
                         </m:ctrlPr>
@@ -23952,7 +23671,7 @@
                         <m:begChr m:val="‖"/>
                         <m:endChr m:val="‖"/>
                         <m:ctrlPr>
-                          <a:rPr lang="en-US" b="0" i="1" smtClean="0">
+                          <a:rPr lang="en-US" b="1" i="0" smtClean="0">
                             <a:latin typeface="Cambria Math" panose="02040503050406030204" pitchFamily="18" charset="0"/>
                           </a:rPr>
                         </m:ctrlPr>
@@ -23990,7 +23709,7 @@
                         <m:sSup>
                           <m:sSupPr>
                             <m:ctrlPr>
-                              <a:rPr lang="en-US" b="0" i="1" smtClean="0">
+                              <a:rPr lang="en-US" b="1" i="0" smtClean="0">
                                 <a:latin typeface="Cambria Math" panose="02040503050406030204" pitchFamily="18" charset="0"/>
                               </a:rPr>
                             </m:ctrlPr>
@@ -24046,7 +23765,7 @@
                         <m:limLow>
                           <m:limLowPr>
                             <m:ctrlPr>
-                              <a:rPr lang="en-US" i="1" smtClean="0">
+                              <a:rPr lang="en-US" i="0" smtClean="0">
                                 <a:latin typeface="Cambria Math" panose="02040503050406030204" pitchFamily="18" charset="0"/>
                               </a:rPr>
                             </m:ctrlPr>
@@ -24117,7 +23836,7 @@
                         <m:sSup>
                           <m:sSupPr>
                             <m:ctrlPr>
-                              <a:rPr lang="en-US" b="0" i="1" smtClean="0">
+                              <a:rPr lang="en-US" b="1" i="0" smtClean="0">
                                 <a:latin typeface="Cambria Math" panose="02040503050406030204" pitchFamily="18" charset="0"/>
                               </a:rPr>
                             </m:ctrlPr>
@@ -24167,7 +23886,7 @@
                     <m:sSup>
                       <m:sSupPr>
                         <m:ctrlPr>
-                          <a:rPr lang="en-US" b="1" i="1">
+                          <a:rPr lang="en-US" b="1">
                             <a:latin typeface="Cambria Math" panose="02040503050406030204" pitchFamily="18" charset="0"/>
                           </a:rPr>
                         </m:ctrlPr>
@@ -24207,7 +23926,7 @@
                     <m:sSup>
                       <m:sSupPr>
                         <m:ctrlPr>
-                          <a:rPr lang="en-US" b="1" i="1" dirty="0" smtClean="0">
+                          <a:rPr lang="en-US" b="1" i="0" dirty="0" smtClean="0">
                             <a:latin typeface="Cambria Math" panose="02040503050406030204" pitchFamily="18" charset="0"/>
                           </a:rPr>
                         </m:ctrlPr>
@@ -24297,7 +24016,7 @@
                         <m:begChr m:val="‖"/>
                         <m:endChr m:val="‖"/>
                         <m:ctrlPr>
-                          <a:rPr lang="en-US" i="1">
+                          <a:rPr lang="en-US" b="1">
                             <a:latin typeface="Cambria Math" panose="02040503050406030204" pitchFamily="18" charset="0"/>
                           </a:rPr>
                         </m:ctrlPr>
@@ -24335,7 +24054,7 @@
                         <m:sSup>
                           <m:sSupPr>
                             <m:ctrlPr>
-                              <a:rPr lang="en-US" i="1">
+                              <a:rPr lang="en-US" b="1">
                                 <a:latin typeface="Cambria Math" panose="02040503050406030204" pitchFamily="18" charset="0"/>
                               </a:rPr>
                             </m:ctrlPr>
@@ -24401,16 +24120,13 @@
                 </a:pPr>
                 <a14:m>
                   <m:oMathPara xmlns:m="http://schemas.openxmlformats.org/officeDocument/2006/math">
-                    <m:oMathParaPr>
-                      <m:jc m:val="centerGroup"/>
-                    </m:oMathParaPr>
-                    <m:oMath xmlns:m="http://schemas.openxmlformats.org/officeDocument/2006/math">
+                    <m:oMath>
                       <m:d>
                         <m:dPr>
                           <m:begChr m:val="‖"/>
                           <m:endChr m:val="‖"/>
                           <m:ctrlPr>
-                            <a:rPr lang="en-US" b="0" i="1" smtClean="0">
+                            <a:rPr lang="en-US" b="1">
                               <a:latin typeface="Cambria Math" panose="02040503050406030204" pitchFamily="18" charset="0"/>
                             </a:rPr>
                           </m:ctrlPr>
@@ -24448,7 +24164,7 @@
                           <m:sSup>
                             <m:sSupPr>
                               <m:ctrlPr>
-                                <a:rPr lang="en-US" i="1">
+                                <a:rPr lang="en-US" b="1">
                                   <a:latin typeface="Cambria Math" panose="02040503050406030204" pitchFamily="18" charset="0"/>
                                 </a:rPr>
                               </m:ctrlPr>
@@ -24489,7 +24205,7 @@
                           <m:begChr m:val="‖"/>
                           <m:endChr m:val="‖"/>
                           <m:ctrlPr>
-                            <a:rPr lang="en-US" i="1">
+                            <a:rPr lang="en-US" b="1">
                               <a:latin typeface="Cambria Math" panose="02040503050406030204" pitchFamily="18" charset="0"/>
                             </a:rPr>
                           </m:ctrlPr>
@@ -24504,7 +24220,7 @@
                           <m:d>
                             <m:dPr>
                               <m:ctrlPr>
-                                <a:rPr lang="en-US" i="1">
+                                <a:rPr lang="en-US" b="0" i="1" smtClean="0">
                                   <a:latin typeface="Cambria Math" panose="02040503050406030204" pitchFamily="18" charset="0"/>
                                 </a:rPr>
                               </m:ctrlPr>
@@ -24527,7 +24243,7 @@
                           <m:sSup>
                             <m:sSupPr>
                               <m:ctrlPr>
-                                <a:rPr lang="en-US" i="1">
+                                <a:rPr lang="en-US" b="1">
                                   <a:latin typeface="Cambria Math" panose="02040503050406030204" pitchFamily="18" charset="0"/>
                                 </a:rPr>
                               </m:ctrlPr>
@@ -25156,7 +24872,7 @@
                       <m:accPr>
                         <m:chr m:val="̇"/>
                         <m:ctrlPr>
-                          <a:rPr lang="en-US" b="0" i="1" smtClean="0">
+                          <a:rPr lang="en-US" b="1" i="0" smtClean="0">
                             <a:latin typeface="Cambria Math" panose="02040503050406030204" pitchFamily="18" charset="0"/>
                           </a:rPr>
                         </m:ctrlPr>
@@ -25462,7 +25178,7 @@
                       <m:accPr>
                         <m:chr m:val="̇"/>
                         <m:ctrlPr>
-                          <a:rPr lang="en-US" b="1" i="1" smtClean="0">
+                          <a:rPr lang="en-US" b="1" i="0" smtClean="0">
                             <a:latin typeface="Cambria Math" panose="02040503050406030204" pitchFamily="18" charset="0"/>
                           </a:rPr>
                         </m:ctrlPr>
@@ -25655,7 +25371,7 @@
                       <m:accPr>
                         <m:chr m:val="̇"/>
                         <m:ctrlPr>
-                          <a:rPr lang="en-US" b="0" i="1" smtClean="0">
+                          <a:rPr lang="en-US" b="1" i="0" smtClean="0">
                             <a:latin typeface="Cambria Math" panose="02040503050406030204" pitchFamily="18" charset="0"/>
                           </a:rPr>
                         </m:ctrlPr>
@@ -26025,7 +25741,7 @@
                         <m:begChr m:val="["/>
                         <m:endChr m:val="]"/>
                         <m:ctrlPr>
-                          <a:rPr lang="en-US" b="0" i="1" smtClean="0">
+                          <a:rPr lang="en-US" i="1">
                             <a:latin typeface="Cambria Math" panose="02040503050406030204" pitchFamily="18" charset="0"/>
                           </a:rPr>
                         </m:ctrlPr>
@@ -26064,13 +25780,7 @@
                                 <a:rPr lang="en-US" b="0" i="1" smtClean="0">
                                   <a:latin typeface="Cambria Math" panose="02040503050406030204" pitchFamily="18" charset="0"/>
                                 </a:rPr>
-                                <m:t>−</m:t>
-                              </m:r>
-                              <m:r>
-                                <a:rPr lang="en-US" b="0" i="1" smtClean="0">
-                                  <a:latin typeface="Cambria Math" panose="02040503050406030204" pitchFamily="18" charset="0"/>
-                                </a:rPr>
-                                <m:t>1</m:t>
+                                <m:t>−1</m:t>
                               </m:r>
                             </m:e>
                           </m:mr>
@@ -26114,7 +25824,7 @@
                         <m:begChr m:val="|"/>
                         <m:endChr m:val="|"/>
                         <m:ctrlPr>
-                          <a:rPr lang="en-US" b="0" i="1" smtClean="0">
+                          <a:rPr lang="en-US" i="1">
                             <a:latin typeface="Cambria Math" panose="02040503050406030204" pitchFamily="18" charset="0"/>
                           </a:rPr>
                         </m:ctrlPr>
@@ -26150,13 +25860,7 @@
                       <a:rPr lang="en-US" b="0" i="1" smtClean="0">
                         <a:latin typeface="Cambria Math" panose="02040503050406030204" pitchFamily="18" charset="0"/>
                       </a:rPr>
-                      <m:t>=</m:t>
-                    </m:r>
-                    <m:r>
-                      <a:rPr lang="en-US" b="0" i="1" smtClean="0">
-                        <a:latin typeface="Cambria Math" panose="02040503050406030204" pitchFamily="18" charset="0"/>
-                      </a:rPr>
-                      <m:t>0</m:t>
+                      <m:t>=0</m:t>
                     </m:r>
                     <m:r>
                       <a:rPr lang="en-US" b="0" i="0" smtClean="0">
@@ -26185,7 +25889,7 @@
                         <m:begChr m:val="|"/>
                         <m:endChr m:val="|"/>
                         <m:ctrlPr>
-                          <a:rPr lang="en-US" b="0" i="1" smtClean="0">
+                          <a:rPr lang="en-US" i="1">
                             <a:latin typeface="Cambria Math" panose="02040503050406030204" pitchFamily="18" charset="0"/>
                           </a:rPr>
                         </m:ctrlPr>
@@ -26236,13 +25940,7 @@
                                 <a:rPr lang="en-US" i="1">
                                   <a:latin typeface="Cambria Math" panose="02040503050406030204" pitchFamily="18" charset="0"/>
                                 </a:rPr>
-                                <m:t>−</m:t>
-                              </m:r>
-                              <m:r>
-                                <a:rPr lang="en-US" i="1">
-                                  <a:latin typeface="Cambria Math" panose="02040503050406030204" pitchFamily="18" charset="0"/>
-                                </a:rPr>
-                                <m:t>1</m:t>
+                                <m:t>−1</m:t>
                               </m:r>
                             </m:e>
                           </m:mr>
@@ -26283,13 +25981,7 @@
                       <a:rPr lang="en-US" b="0" i="1" smtClean="0">
                         <a:latin typeface="Cambria Math" panose="02040503050406030204" pitchFamily="18" charset="0"/>
                       </a:rPr>
-                      <m:t>=</m:t>
-                    </m:r>
-                    <m:r>
-                      <a:rPr lang="en-US" b="0" i="1" smtClean="0">
-                        <a:latin typeface="Cambria Math" panose="02040503050406030204" pitchFamily="18" charset="0"/>
-                      </a:rPr>
-                      <m:t>0</m:t>
+                      <m:t>=0</m:t>
                     </m:r>
                   </m:oMath>
                 </a14:m>
@@ -26312,13 +26004,7 @@
                           <a:rPr lang="en-US" b="0" i="1" smtClean="0">
                             <a:latin typeface="Cambria Math" panose="02040503050406030204" pitchFamily="18" charset="0"/>
                           </a:rPr>
-                          <m:t>1</m:t>
-                        </m:r>
-                        <m:r>
-                          <a:rPr lang="en-US" b="0" i="1" smtClean="0">
-                            <a:latin typeface="Cambria Math" panose="02040503050406030204" pitchFamily="18" charset="0"/>
-                          </a:rPr>
-                          <m:t>−</m:t>
+                          <m:t>1−</m:t>
                         </m:r>
                         <m:r>
                           <a:rPr lang="en-US" b="0" i="1" smtClean="0">
@@ -26341,13 +26027,7 @@
                           <a:rPr lang="en-US" b="0" i="1" smtClean="0">
                             <a:latin typeface="Cambria Math" panose="02040503050406030204" pitchFamily="18" charset="0"/>
                           </a:rPr>
-                          <m:t>2</m:t>
-                        </m:r>
-                        <m:r>
-                          <a:rPr lang="en-US" b="0" i="1" smtClean="0">
-                            <a:latin typeface="Cambria Math" panose="02040503050406030204" pitchFamily="18" charset="0"/>
-                          </a:rPr>
-                          <m:t>−</m:t>
+                          <m:t>2−</m:t>
                         </m:r>
                         <m:r>
                           <a:rPr lang="en-US" b="0" i="1" smtClean="0">
@@ -26361,25 +26041,7 @@
                       <a:rPr lang="en-US" b="0" i="1" smtClean="0">
                         <a:latin typeface="Cambria Math" panose="02040503050406030204" pitchFamily="18" charset="0"/>
                       </a:rPr>
-                      <m:t>+</m:t>
-                    </m:r>
-                    <m:r>
-                      <a:rPr lang="en-US" b="0" i="1" smtClean="0">
-                        <a:latin typeface="Cambria Math" panose="02040503050406030204" pitchFamily="18" charset="0"/>
-                      </a:rPr>
-                      <m:t>3</m:t>
-                    </m:r>
-                    <m:r>
-                      <a:rPr lang="en-US" b="0" i="1" smtClean="0">
-                        <a:latin typeface="Cambria Math" panose="02040503050406030204" pitchFamily="18" charset="0"/>
-                      </a:rPr>
-                      <m:t>=</m:t>
-                    </m:r>
-                    <m:r>
-                      <a:rPr lang="en-US" b="0" i="1" smtClean="0">
-                        <a:latin typeface="Cambria Math" panose="02040503050406030204" pitchFamily="18" charset="0"/>
-                      </a:rPr>
-                      <m:t>0</m:t>
+                      <m:t>+3=0</m:t>
                     </m:r>
                   </m:oMath>
                 </a14:m>
@@ -26426,13 +26088,7 @@
                           <a:rPr lang="en-US" b="0" i="1" smtClean="0">
                             <a:latin typeface="Cambria Math" panose="02040503050406030204" pitchFamily="18" charset="0"/>
                           </a:rPr>
-                          <m:t>−</m:t>
-                        </m:r>
-                        <m:r>
-                          <a:rPr lang="en-US" b="0" i="1" smtClean="0">
-                            <a:latin typeface="Cambria Math" panose="02040503050406030204" pitchFamily="18" charset="0"/>
-                          </a:rPr>
-                          <m:t>3</m:t>
+                          <m:t>−3</m:t>
                         </m:r>
                         <m:r>
                           <a:rPr lang="en-US" b="0" i="1" smtClean="0">
@@ -26444,25 +26100,7 @@
                           <a:rPr lang="en-US" b="0" i="1" smtClean="0">
                             <a:latin typeface="Cambria Math" panose="02040503050406030204" pitchFamily="18" charset="0"/>
                           </a:rPr>
-                          <m:t>+</m:t>
-                        </m:r>
-                        <m:r>
-                          <a:rPr lang="en-US" b="0" i="1" smtClean="0">
-                            <a:latin typeface="Cambria Math" panose="02040503050406030204" pitchFamily="18" charset="0"/>
-                          </a:rPr>
-                          <m:t>2</m:t>
-                        </m:r>
-                        <m:r>
-                          <a:rPr lang="en-US" b="0" i="1" smtClean="0">
-                            <a:latin typeface="Cambria Math" panose="02040503050406030204" pitchFamily="18" charset="0"/>
-                          </a:rPr>
-                          <m:t>+</m:t>
-                        </m:r>
-                        <m:r>
-                          <a:rPr lang="en-US" b="0" i="1" smtClean="0">
-                            <a:latin typeface="Cambria Math" panose="02040503050406030204" pitchFamily="18" charset="0"/>
-                          </a:rPr>
-                          <m:t>3</m:t>
+                          <m:t>+2+3</m:t>
                         </m:r>
                       </m:e>
                     </m:d>
@@ -26470,13 +26108,7 @@
                       <a:rPr lang="en-US" b="0" i="1" smtClean="0">
                         <a:latin typeface="Cambria Math" panose="02040503050406030204" pitchFamily="18" charset="0"/>
                       </a:rPr>
-                      <m:t>=</m:t>
-                    </m:r>
-                    <m:r>
-                      <a:rPr lang="en-US" b="0" i="1" smtClean="0">
-                        <a:latin typeface="Cambria Math" panose="02040503050406030204" pitchFamily="18" charset="0"/>
-                      </a:rPr>
-                      <m:t>0</m:t>
+                      <m:t>=0</m:t>
                     </m:r>
                   </m:oMath>
                 </a14:m>
@@ -26523,13 +26155,7 @@
                               <a:rPr lang="en-US" b="0" i="1" smtClean="0">
                                 <a:latin typeface="Cambria Math" panose="02040503050406030204" pitchFamily="18" charset="0"/>
                               </a:rPr>
-                              <m:t>3</m:t>
-                            </m:r>
-                            <m:r>
-                              <a:rPr lang="en-US" b="0" i="1" smtClean="0">
-                                <a:latin typeface="Cambria Math" panose="02040503050406030204" pitchFamily="18" charset="0"/>
-                              </a:rPr>
-                              <m:t> ±</m:t>
+                              <m:t>3 ±</m:t>
                             </m:r>
                             <m:rad>
                               <m:radPr>
@@ -26546,31 +26172,7 @@
                                   <a:rPr lang="en-US" b="0" i="1" smtClean="0">
                                     <a:latin typeface="Cambria Math" panose="02040503050406030204" pitchFamily="18" charset="0"/>
                                   </a:rPr>
-                                  <m:t>9</m:t>
-                                </m:r>
-                                <m:r>
-                                  <a:rPr lang="en-US" b="0" i="1" smtClean="0">
-                                    <a:latin typeface="Cambria Math" panose="02040503050406030204" pitchFamily="18" charset="0"/>
-                                  </a:rPr>
-                                  <m:t>−</m:t>
-                                </m:r>
-                                <m:r>
-                                  <a:rPr lang="en-US" b="0" i="1" smtClean="0">
-                                    <a:latin typeface="Cambria Math" panose="02040503050406030204" pitchFamily="18" charset="0"/>
-                                  </a:rPr>
-                                  <m:t>4</m:t>
-                                </m:r>
-                                <m:r>
-                                  <a:rPr lang="en-US" b="0" i="1" smtClean="0">
-                                    <a:latin typeface="Cambria Math" panose="02040503050406030204" pitchFamily="18" charset="0"/>
-                                  </a:rPr>
-                                  <m:t>×</m:t>
-                                </m:r>
-                                <m:r>
-                                  <a:rPr lang="en-US" b="0" i="1" smtClean="0">
-                                    <a:latin typeface="Cambria Math" panose="02040503050406030204" pitchFamily="18" charset="0"/>
-                                  </a:rPr>
-                                  <m:t>5</m:t>
+                                  <m:t>9−4×5</m:t>
                                 </m:r>
                               </m:e>
                             </m:rad>
@@ -26590,49 +26192,13 @@
                       <a:rPr lang="en-US" b="0" i="0" smtClean="0">
                         <a:latin typeface="Cambria Math" panose="02040503050406030204" pitchFamily="18" charset="0"/>
                       </a:rPr>
-                      <m:t>=</m:t>
-                    </m:r>
-                    <m:r>
-                      <a:rPr lang="en-US" b="0" i="0" smtClean="0">
-                        <a:latin typeface="Cambria Math" panose="02040503050406030204" pitchFamily="18" charset="0"/>
-                      </a:rPr>
-                      <m:t>1</m:t>
-                    </m:r>
-                    <m:r>
-                      <a:rPr lang="en-US" b="0" i="0" smtClean="0">
-                        <a:latin typeface="Cambria Math" panose="02040503050406030204" pitchFamily="18" charset="0"/>
-                      </a:rPr>
-                      <m:t>.</m:t>
-                    </m:r>
-                    <m:r>
-                      <a:rPr lang="en-US" b="0" i="0" smtClean="0">
-                        <a:latin typeface="Cambria Math" panose="02040503050406030204" pitchFamily="18" charset="0"/>
-                      </a:rPr>
-                      <m:t>5</m:t>
+                      <m:t>=1.5</m:t>
                     </m:r>
                     <m:r>
                       <a:rPr lang="en-US" b="0" i="1" smtClean="0">
                         <a:latin typeface="Cambria Math" panose="02040503050406030204" pitchFamily="18" charset="0"/>
                       </a:rPr>
-                      <m:t>±</m:t>
-                    </m:r>
-                    <m:r>
-                      <a:rPr lang="en-US" b="0" i="1" smtClean="0">
-                        <a:latin typeface="Cambria Math" panose="02040503050406030204" pitchFamily="18" charset="0"/>
-                      </a:rPr>
-                      <m:t>1</m:t>
-                    </m:r>
-                    <m:r>
-                      <a:rPr lang="en-US" b="0" i="1" smtClean="0">
-                        <a:latin typeface="Cambria Math" panose="02040503050406030204" pitchFamily="18" charset="0"/>
-                      </a:rPr>
-                      <m:t>.</m:t>
-                    </m:r>
-                    <m:r>
-                      <a:rPr lang="en-US" b="0" i="1" smtClean="0">
-                        <a:latin typeface="Cambria Math" panose="02040503050406030204" pitchFamily="18" charset="0"/>
-                      </a:rPr>
-                      <m:t>65</m:t>
+                      <m:t>±1.65</m:t>
                     </m:r>
                     <m:r>
                       <a:rPr lang="en-US" b="0" i="1" smtClean="0">
@@ -26792,6 +26358,333 @@
   <p:clrMapOvr>
     <a:masterClrMapping/>
   </p:clrMapOvr>
+  <p:timing>
+    <p:tnLst>
+      <p:par>
+        <p:cTn id="1" dur="indefinite" restart="never" nodeType="tmRoot">
+          <p:childTnLst>
+            <p:seq concurrent="1" nextAc="seek">
+              <p:cTn id="2" dur="indefinite" nodeType="mainSeq">
+                <p:childTnLst>
+                  <p:par>
+                    <p:cTn id="3" fill="hold">
+                      <p:stCondLst>
+                        <p:cond delay="indefinite"/>
+                      </p:stCondLst>
+                      <p:childTnLst>
+                        <p:par>
+                          <p:cTn id="4" fill="hold">
+                            <p:stCondLst>
+                              <p:cond delay="0"/>
+                            </p:stCondLst>
+                            <p:childTnLst>
+                              <p:par>
+                                <p:cTn id="5" presetID="1" presetClass="entr" presetSubtype="0" fill="hold" grpId="0" nodeType="clickEffect">
+                                  <p:stCondLst>
+                                    <p:cond delay="0"/>
+                                  </p:stCondLst>
+                                  <p:childTnLst>
+                                    <p:set>
+                                      <p:cBhvr>
+                                        <p:cTn id="6" dur="1" fill="hold">
+                                          <p:stCondLst>
+                                            <p:cond delay="0"/>
+                                          </p:stCondLst>
+                                        </p:cTn>
+                                        <p:tgtEl>
+                                          <p:spTgt spid="2">
+                                            <p:txEl>
+                                              <p:pRg st="0" end="0"/>
+                                            </p:txEl>
+                                          </p:spTgt>
+                                        </p:tgtEl>
+                                        <p:attrNameLst>
+                                          <p:attrName>style.visibility</p:attrName>
+                                        </p:attrNameLst>
+                                      </p:cBhvr>
+                                      <p:to>
+                                        <p:strVal val="visible"/>
+                                      </p:to>
+                                    </p:set>
+                                  </p:childTnLst>
+                                </p:cTn>
+                              </p:par>
+                            </p:childTnLst>
+                          </p:cTn>
+                        </p:par>
+                      </p:childTnLst>
+                    </p:cTn>
+                  </p:par>
+                  <p:par>
+                    <p:cTn id="7" fill="hold">
+                      <p:stCondLst>
+                        <p:cond delay="indefinite"/>
+                      </p:stCondLst>
+                      <p:childTnLst>
+                        <p:par>
+                          <p:cTn id="8" fill="hold">
+                            <p:stCondLst>
+                              <p:cond delay="0"/>
+                            </p:stCondLst>
+                            <p:childTnLst>
+                              <p:par>
+                                <p:cTn id="9" presetID="1" presetClass="entr" presetSubtype="0" fill="hold" grpId="0" nodeType="clickEffect">
+                                  <p:stCondLst>
+                                    <p:cond delay="0"/>
+                                  </p:stCondLst>
+                                  <p:childTnLst>
+                                    <p:set>
+                                      <p:cBhvr>
+                                        <p:cTn id="10" dur="1" fill="hold">
+                                          <p:stCondLst>
+                                            <p:cond delay="0"/>
+                                          </p:stCondLst>
+                                        </p:cTn>
+                                        <p:tgtEl>
+                                          <p:spTgt spid="2">
+                                            <p:txEl>
+                                              <p:pRg st="2" end="2"/>
+                                            </p:txEl>
+                                          </p:spTgt>
+                                        </p:tgtEl>
+                                        <p:attrNameLst>
+                                          <p:attrName>style.visibility</p:attrName>
+                                        </p:attrNameLst>
+                                      </p:cBhvr>
+                                      <p:to>
+                                        <p:strVal val="visible"/>
+                                      </p:to>
+                                    </p:set>
+                                  </p:childTnLst>
+                                </p:cTn>
+                              </p:par>
+                            </p:childTnLst>
+                          </p:cTn>
+                        </p:par>
+                      </p:childTnLst>
+                    </p:cTn>
+                  </p:par>
+                  <p:par>
+                    <p:cTn id="11" fill="hold">
+                      <p:stCondLst>
+                        <p:cond delay="indefinite"/>
+                      </p:stCondLst>
+                      <p:childTnLst>
+                        <p:par>
+                          <p:cTn id="12" fill="hold">
+                            <p:stCondLst>
+                              <p:cond delay="0"/>
+                            </p:stCondLst>
+                            <p:childTnLst>
+                              <p:par>
+                                <p:cTn id="13" presetID="1" presetClass="entr" presetSubtype="0" fill="hold" grpId="0" nodeType="clickEffect">
+                                  <p:stCondLst>
+                                    <p:cond delay="0"/>
+                                  </p:stCondLst>
+                                  <p:childTnLst>
+                                    <p:set>
+                                      <p:cBhvr>
+                                        <p:cTn id="14" dur="1" fill="hold">
+                                          <p:stCondLst>
+                                            <p:cond delay="0"/>
+                                          </p:stCondLst>
+                                        </p:cTn>
+                                        <p:tgtEl>
+                                          <p:spTgt spid="2">
+                                            <p:txEl>
+                                              <p:pRg st="3" end="3"/>
+                                            </p:txEl>
+                                          </p:spTgt>
+                                        </p:tgtEl>
+                                        <p:attrNameLst>
+                                          <p:attrName>style.visibility</p:attrName>
+                                        </p:attrNameLst>
+                                      </p:cBhvr>
+                                      <p:to>
+                                        <p:strVal val="visible"/>
+                                      </p:to>
+                                    </p:set>
+                                  </p:childTnLst>
+                                </p:cTn>
+                              </p:par>
+                            </p:childTnLst>
+                          </p:cTn>
+                        </p:par>
+                      </p:childTnLst>
+                    </p:cTn>
+                  </p:par>
+                  <p:par>
+                    <p:cTn id="15" fill="hold">
+                      <p:stCondLst>
+                        <p:cond delay="indefinite"/>
+                      </p:stCondLst>
+                      <p:childTnLst>
+                        <p:par>
+                          <p:cTn id="16" fill="hold">
+                            <p:stCondLst>
+                              <p:cond delay="0"/>
+                            </p:stCondLst>
+                            <p:childTnLst>
+                              <p:par>
+                                <p:cTn id="17" presetID="1" presetClass="entr" presetSubtype="0" fill="hold" grpId="0" nodeType="clickEffect">
+                                  <p:stCondLst>
+                                    <p:cond delay="0"/>
+                                  </p:stCondLst>
+                                  <p:childTnLst>
+                                    <p:set>
+                                      <p:cBhvr>
+                                        <p:cTn id="18" dur="1" fill="hold">
+                                          <p:stCondLst>
+                                            <p:cond delay="0"/>
+                                          </p:stCondLst>
+                                        </p:cTn>
+                                        <p:tgtEl>
+                                          <p:spTgt spid="2">
+                                            <p:txEl>
+                                              <p:pRg st="4" end="4"/>
+                                            </p:txEl>
+                                          </p:spTgt>
+                                        </p:tgtEl>
+                                        <p:attrNameLst>
+                                          <p:attrName>style.visibility</p:attrName>
+                                        </p:attrNameLst>
+                                      </p:cBhvr>
+                                      <p:to>
+                                        <p:strVal val="visible"/>
+                                      </p:to>
+                                    </p:set>
+                                  </p:childTnLst>
+                                </p:cTn>
+                              </p:par>
+                            </p:childTnLst>
+                          </p:cTn>
+                        </p:par>
+                      </p:childTnLst>
+                    </p:cTn>
+                  </p:par>
+                  <p:par>
+                    <p:cTn id="19" fill="hold">
+                      <p:stCondLst>
+                        <p:cond delay="indefinite"/>
+                      </p:stCondLst>
+                      <p:childTnLst>
+                        <p:par>
+                          <p:cTn id="20" fill="hold">
+                            <p:stCondLst>
+                              <p:cond delay="0"/>
+                            </p:stCondLst>
+                            <p:childTnLst>
+                              <p:par>
+                                <p:cTn id="21" presetID="1" presetClass="entr" presetSubtype="0" fill="hold" grpId="0" nodeType="clickEffect">
+                                  <p:stCondLst>
+                                    <p:cond delay="0"/>
+                                  </p:stCondLst>
+                                  <p:childTnLst>
+                                    <p:set>
+                                      <p:cBhvr>
+                                        <p:cTn id="22" dur="1" fill="hold">
+                                          <p:stCondLst>
+                                            <p:cond delay="0"/>
+                                          </p:stCondLst>
+                                        </p:cTn>
+                                        <p:tgtEl>
+                                          <p:spTgt spid="2">
+                                            <p:txEl>
+                                              <p:pRg st="5" end="5"/>
+                                            </p:txEl>
+                                          </p:spTgt>
+                                        </p:tgtEl>
+                                        <p:attrNameLst>
+                                          <p:attrName>style.visibility</p:attrName>
+                                        </p:attrNameLst>
+                                      </p:cBhvr>
+                                      <p:to>
+                                        <p:strVal val="visible"/>
+                                      </p:to>
+                                    </p:set>
+                                  </p:childTnLst>
+                                </p:cTn>
+                              </p:par>
+                            </p:childTnLst>
+                          </p:cTn>
+                        </p:par>
+                      </p:childTnLst>
+                    </p:cTn>
+                  </p:par>
+                  <p:par>
+                    <p:cTn id="23" fill="hold">
+                      <p:stCondLst>
+                        <p:cond delay="indefinite"/>
+                      </p:stCondLst>
+                      <p:childTnLst>
+                        <p:par>
+                          <p:cTn id="24" fill="hold">
+                            <p:stCondLst>
+                              <p:cond delay="0"/>
+                            </p:stCondLst>
+                            <p:childTnLst>
+                              <p:par>
+                                <p:cTn id="25" presetID="1" presetClass="entr" presetSubtype="0" fill="hold" grpId="0" nodeType="clickEffect">
+                                  <p:stCondLst>
+                                    <p:cond delay="0"/>
+                                  </p:stCondLst>
+                                  <p:childTnLst>
+                                    <p:set>
+                                      <p:cBhvr>
+                                        <p:cTn id="26" dur="1" fill="hold">
+                                          <p:stCondLst>
+                                            <p:cond delay="0"/>
+                                          </p:stCondLst>
+                                        </p:cTn>
+                                        <p:tgtEl>
+                                          <p:spTgt spid="2">
+                                            <p:txEl>
+                                              <p:pRg st="6" end="6"/>
+                                            </p:txEl>
+                                          </p:spTgt>
+                                        </p:tgtEl>
+                                        <p:attrNameLst>
+                                          <p:attrName>style.visibility</p:attrName>
+                                        </p:attrNameLst>
+                                      </p:cBhvr>
+                                      <p:to>
+                                        <p:strVal val="visible"/>
+                                      </p:to>
+                                    </p:set>
+                                  </p:childTnLst>
+                                </p:cTn>
+                              </p:par>
+                            </p:childTnLst>
+                          </p:cTn>
+                        </p:par>
+                      </p:childTnLst>
+                    </p:cTn>
+                  </p:par>
+                </p:childTnLst>
+              </p:cTn>
+              <p:prevCondLst>
+                <p:cond evt="onPrev" delay="0">
+                  <p:tgtEl>
+                    <p:sldTgt/>
+                  </p:tgtEl>
+                </p:cond>
+              </p:prevCondLst>
+              <p:nextCondLst>
+                <p:cond evt="onNext" delay="0">
+                  <p:tgtEl>
+                    <p:sldTgt/>
+                  </p:tgtEl>
+                </p:cond>
+              </p:nextCondLst>
+            </p:seq>
+          </p:childTnLst>
+        </p:cTn>
+      </p:par>
+    </p:tnLst>
+    <p:bldLst>
+      <p:bldP spid="2" grpId="0" build="p"/>
+    </p:bldLst>
+  </p:timing>
 </p:sld>
 </file>
 
@@ -26854,7 +26747,7 @@
                         <m:begChr m:val="["/>
                         <m:endChr m:val="]"/>
                         <m:ctrlPr>
-                          <a:rPr lang="en-US" b="0" i="1" smtClean="0">
+                          <a:rPr lang="en-US" i="1">
                             <a:latin typeface="Cambria Math" panose="02040503050406030204" pitchFamily="18" charset="0"/>
                           </a:rPr>
                         </m:ctrlPr>
@@ -26893,13 +26786,7 @@
                                 <a:rPr lang="en-US" b="0" i="1" smtClean="0">
                                   <a:latin typeface="Cambria Math" panose="02040503050406030204" pitchFamily="18" charset="0"/>
                                 </a:rPr>
-                                <m:t>−</m:t>
-                              </m:r>
-                              <m:r>
-                                <a:rPr lang="en-US" b="0" i="1" smtClean="0">
-                                  <a:latin typeface="Cambria Math" panose="02040503050406030204" pitchFamily="18" charset="0"/>
-                                </a:rPr>
-                                <m:t>1</m:t>
+                                <m:t>−1</m:t>
                               </m:r>
                             </m:e>
                           </m:mr>
@@ -26917,13 +26804,7 @@
                                 <a:rPr lang="en-US" b="0" i="1" smtClean="0">
                                   <a:latin typeface="Cambria Math" panose="02040503050406030204" pitchFamily="18" charset="0"/>
                                 </a:rPr>
-                                <m:t>−</m:t>
-                              </m:r>
-                              <m:r>
-                                <a:rPr lang="en-US" b="0" i="1" smtClean="0">
-                                  <a:latin typeface="Cambria Math" panose="02040503050406030204" pitchFamily="18" charset="0"/>
-                                </a:rPr>
-                                <m:t>2</m:t>
+                                <m:t>−2</m:t>
                               </m:r>
                             </m:e>
                           </m:mr>
@@ -26949,7 +26830,7 @@
                         <m:begChr m:val="|"/>
                         <m:endChr m:val="|"/>
                         <m:ctrlPr>
-                          <a:rPr lang="en-US" b="0" i="1" smtClean="0">
+                          <a:rPr lang="en-US" i="1">
                             <a:latin typeface="Cambria Math" panose="02040503050406030204" pitchFamily="18" charset="0"/>
                           </a:rPr>
                         </m:ctrlPr>
@@ -26985,13 +26866,7 @@
                       <a:rPr lang="en-US" b="0" i="1" smtClean="0">
                         <a:latin typeface="Cambria Math" panose="02040503050406030204" pitchFamily="18" charset="0"/>
                       </a:rPr>
-                      <m:t>=</m:t>
-                    </m:r>
-                    <m:r>
-                      <a:rPr lang="en-US" b="0" i="1" smtClean="0">
-                        <a:latin typeface="Cambria Math" panose="02040503050406030204" pitchFamily="18" charset="0"/>
-                      </a:rPr>
-                      <m:t>0</m:t>
+                      <m:t>=0</m:t>
                     </m:r>
                     <m:r>
                       <a:rPr lang="en-US" b="0" i="0" smtClean="0">
@@ -27020,7 +26895,7 @@
                         <m:begChr m:val="|"/>
                         <m:endChr m:val="|"/>
                         <m:ctrlPr>
-                          <a:rPr lang="en-US" b="0" i="1" smtClean="0">
+                          <a:rPr lang="en-US" i="1">
                             <a:latin typeface="Cambria Math" panose="02040503050406030204" pitchFamily="18" charset="0"/>
                           </a:rPr>
                         </m:ctrlPr>
@@ -27071,13 +26946,7 @@
                                 <a:rPr lang="en-US" i="1">
                                   <a:latin typeface="Cambria Math" panose="02040503050406030204" pitchFamily="18" charset="0"/>
                                 </a:rPr>
-                                <m:t>−</m:t>
-                              </m:r>
-                              <m:r>
-                                <a:rPr lang="en-US" i="1">
-                                  <a:latin typeface="Cambria Math" panose="02040503050406030204" pitchFamily="18" charset="0"/>
-                                </a:rPr>
-                                <m:t>1</m:t>
+                                <m:t>−1</m:t>
                               </m:r>
                             </m:e>
                           </m:mr>
@@ -27124,13 +26993,7 @@
                       <a:rPr lang="en-US" b="0" i="1" smtClean="0">
                         <a:latin typeface="Cambria Math" panose="02040503050406030204" pitchFamily="18" charset="0"/>
                       </a:rPr>
-                      <m:t>=</m:t>
-                    </m:r>
-                    <m:r>
-                      <a:rPr lang="en-US" b="0" i="1" smtClean="0">
-                        <a:latin typeface="Cambria Math" panose="02040503050406030204" pitchFamily="18" charset="0"/>
-                      </a:rPr>
-                      <m:t>0</m:t>
+                      <m:t>=0</m:t>
                     </m:r>
                   </m:oMath>
                 </a14:m>
@@ -27153,13 +27016,7 @@
                           <a:rPr lang="en-US" b="0" i="1" smtClean="0">
                             <a:latin typeface="Cambria Math" panose="02040503050406030204" pitchFamily="18" charset="0"/>
                           </a:rPr>
-                          <m:t>1</m:t>
-                        </m:r>
-                        <m:r>
-                          <a:rPr lang="en-US" b="0" i="1" smtClean="0">
-                            <a:latin typeface="Cambria Math" panose="02040503050406030204" pitchFamily="18" charset="0"/>
-                          </a:rPr>
-                          <m:t>−</m:t>
+                          <m:t>1−</m:t>
                         </m:r>
                         <m:r>
                           <a:rPr lang="en-US" b="0" i="1" smtClean="0">
@@ -27182,19 +27039,7 @@
                           <a:rPr lang="en-US" b="0" i="1" smtClean="0">
                             <a:latin typeface="Cambria Math" panose="02040503050406030204" pitchFamily="18" charset="0"/>
                           </a:rPr>
-                          <m:t>−</m:t>
-                        </m:r>
-                        <m:r>
-                          <a:rPr lang="en-US" b="0" i="1" smtClean="0">
-                            <a:latin typeface="Cambria Math" panose="02040503050406030204" pitchFamily="18" charset="0"/>
-                          </a:rPr>
-                          <m:t>2</m:t>
-                        </m:r>
-                        <m:r>
-                          <a:rPr lang="en-US" b="0" i="1" smtClean="0">
-                            <a:latin typeface="Cambria Math" panose="02040503050406030204" pitchFamily="18" charset="0"/>
-                          </a:rPr>
-                          <m:t>−</m:t>
+                          <m:t>−2−</m:t>
                         </m:r>
                         <m:r>
                           <a:rPr lang="en-US" b="0" i="1" smtClean="0">
@@ -27208,25 +27053,7 @@
                       <a:rPr lang="en-US" b="0" i="1" smtClean="0">
                         <a:latin typeface="Cambria Math" panose="02040503050406030204" pitchFamily="18" charset="0"/>
                       </a:rPr>
-                      <m:t>+</m:t>
-                    </m:r>
-                    <m:r>
-                      <a:rPr lang="en-US" b="0" i="1" smtClean="0">
-                        <a:latin typeface="Cambria Math" panose="02040503050406030204" pitchFamily="18" charset="0"/>
-                      </a:rPr>
-                      <m:t>3</m:t>
-                    </m:r>
-                    <m:r>
-                      <a:rPr lang="en-US" b="0" i="1" smtClean="0">
-                        <a:latin typeface="Cambria Math" panose="02040503050406030204" pitchFamily="18" charset="0"/>
-                      </a:rPr>
-                      <m:t>=</m:t>
-                    </m:r>
-                    <m:r>
-                      <a:rPr lang="en-US" b="0" i="1" smtClean="0">
-                        <a:latin typeface="Cambria Math" panose="02040503050406030204" pitchFamily="18" charset="0"/>
-                      </a:rPr>
-                      <m:t>0</m:t>
+                      <m:t>+3=0</m:t>
                     </m:r>
                   </m:oMath>
                 </a14:m>
@@ -27285,25 +27112,7 @@
                           <a:rPr lang="en-US" b="0" i="1" smtClean="0">
                             <a:latin typeface="Cambria Math" panose="02040503050406030204" pitchFamily="18" charset="0"/>
                           </a:rPr>
-                          <m:t>−</m:t>
-                        </m:r>
-                        <m:r>
-                          <a:rPr lang="en-US" b="0" i="1" smtClean="0">
-                            <a:latin typeface="Cambria Math" panose="02040503050406030204" pitchFamily="18" charset="0"/>
-                          </a:rPr>
-                          <m:t>2</m:t>
-                        </m:r>
-                        <m:r>
-                          <a:rPr lang="en-US" b="0" i="1" smtClean="0">
-                            <a:latin typeface="Cambria Math" panose="02040503050406030204" pitchFamily="18" charset="0"/>
-                          </a:rPr>
-                          <m:t>+</m:t>
-                        </m:r>
-                        <m:r>
-                          <a:rPr lang="en-US" b="0" i="1" smtClean="0">
-                            <a:latin typeface="Cambria Math" panose="02040503050406030204" pitchFamily="18" charset="0"/>
-                          </a:rPr>
-                          <m:t>3</m:t>
+                          <m:t>−2+3</m:t>
                         </m:r>
                       </m:e>
                     </m:d>
@@ -27311,13 +27120,7 @@
                       <a:rPr lang="en-US" b="0" i="1" smtClean="0">
                         <a:latin typeface="Cambria Math" panose="02040503050406030204" pitchFamily="18" charset="0"/>
                       </a:rPr>
-                      <m:t>=</m:t>
-                    </m:r>
-                    <m:r>
-                      <a:rPr lang="en-US" b="0" i="1" smtClean="0">
-                        <a:latin typeface="Cambria Math" panose="02040503050406030204" pitchFamily="18" charset="0"/>
-                      </a:rPr>
-                      <m:t>0</m:t>
+                      <m:t>=0</m:t>
                     </m:r>
                   </m:oMath>
                 </a14:m>
@@ -27364,19 +27167,7 @@
                               <a:rPr lang="en-US" b="0" i="1" smtClean="0">
                                 <a:latin typeface="Cambria Math" panose="02040503050406030204" pitchFamily="18" charset="0"/>
                               </a:rPr>
-                              <m:t>−</m:t>
-                            </m:r>
-                            <m:r>
-                              <a:rPr lang="en-US" b="0" i="1" smtClean="0">
-                                <a:latin typeface="Cambria Math" panose="02040503050406030204" pitchFamily="18" charset="0"/>
-                              </a:rPr>
-                              <m:t>1</m:t>
-                            </m:r>
-                            <m:r>
-                              <a:rPr lang="en-US" b="0" i="1" smtClean="0">
-                                <a:latin typeface="Cambria Math" panose="02040503050406030204" pitchFamily="18" charset="0"/>
-                              </a:rPr>
-                              <m:t>±</m:t>
+                              <m:t>−1±</m:t>
                             </m:r>
                             <m:rad>
                               <m:radPr>
@@ -27393,13 +27184,7 @@
                                   <a:rPr lang="en-US" b="0" i="1" smtClean="0">
                                     <a:latin typeface="Cambria Math" panose="02040503050406030204" pitchFamily="18" charset="0"/>
                                   </a:rPr>
-                                  <m:t>−</m:t>
-                                </m:r>
-                                <m:r>
-                                  <a:rPr lang="en-US" b="0" i="1" smtClean="0">
-                                    <a:latin typeface="Cambria Math" panose="02040503050406030204" pitchFamily="18" charset="0"/>
-                                  </a:rPr>
-                                  <m:t>3</m:t>
+                                  <m:t>−3</m:t>
                                 </m:r>
                               </m:e>
                             </m:rad>
@@ -27419,25 +27204,7 @@
                       <a:rPr lang="en-US" b="0" i="0" smtClean="0">
                         <a:latin typeface="Cambria Math" panose="02040503050406030204" pitchFamily="18" charset="0"/>
                       </a:rPr>
-                      <m:t>=−</m:t>
-                    </m:r>
-                    <m:r>
-                      <a:rPr lang="en-US" b="0" i="0" smtClean="0">
-                        <a:latin typeface="Cambria Math" panose="02040503050406030204" pitchFamily="18" charset="0"/>
-                      </a:rPr>
-                      <m:t>0</m:t>
-                    </m:r>
-                    <m:r>
-                      <a:rPr lang="en-US" b="0" i="0" smtClean="0">
-                        <a:latin typeface="Cambria Math" panose="02040503050406030204" pitchFamily="18" charset="0"/>
-                      </a:rPr>
-                      <m:t>.</m:t>
-                    </m:r>
-                    <m:r>
-                      <a:rPr lang="en-US" b="0" i="0" smtClean="0">
-                        <a:latin typeface="Cambria Math" panose="02040503050406030204" pitchFamily="18" charset="0"/>
-                      </a:rPr>
-                      <m:t>5</m:t>
+                      <m:t>=−0.5</m:t>
                     </m:r>
                     <m:r>
                       <a:rPr lang="en-US" b="0" i="1" smtClean="0">
